--- a/재정학/01_Lectures/재정학_Chapter_8.pptx
+++ b/재정학/01_Lectures/재정학_Chapter_8.pptx
@@ -243,7 +243,7 @@
           <a:p>
             <a:fld id="{4A5E00EF-AEA4-43E2-9451-8F9C59A39471}" type="datetimeFigureOut">
               <a:rPr lang="ko-KR" altLang="en-US" smtClean="0"/>
-              <a:t>2026-03-19</a:t>
+              <a:t>2026-05-13</a:t>
             </a:fld>
             <a:endParaRPr lang="ko-KR" altLang="en-US"/>
           </a:p>
@@ -665,7 +665,7 @@
           <a:p>
             <a:fld id="{CD32C56F-BD27-4999-9E6D-D4EACE3DA9F4}" type="datetime1">
               <a:rPr lang="ko-KR" altLang="en-US" smtClean="0"/>
-              <a:t>2026-03-19</a:t>
+              <a:t>2026-05-13</a:t>
             </a:fld>
             <a:endParaRPr lang="ko-KR" altLang="en-US"/>
           </a:p>
@@ -879,7 +879,7 @@
           <a:p>
             <a:fld id="{8EF4A19C-72C8-45CA-8E3F-68A7FA345D6C}" type="datetime1">
               <a:rPr lang="ko-KR" altLang="en-US" smtClean="0"/>
-              <a:t>2026-03-19</a:t>
+              <a:t>2026-05-13</a:t>
             </a:fld>
             <a:endParaRPr lang="ko-KR" altLang="en-US"/>
           </a:p>
@@ -1103,7 +1103,7 @@
           <a:p>
             <a:fld id="{56A175B2-010B-4341-954C-5F8F5C70B124}" type="datetime1">
               <a:rPr lang="ko-KR" altLang="en-US" smtClean="0"/>
-              <a:t>2026-03-19</a:t>
+              <a:t>2026-05-13</a:t>
             </a:fld>
             <a:endParaRPr lang="ko-KR" altLang="en-US"/>
           </a:p>
@@ -1317,7 +1317,7 @@
           <a:p>
             <a:fld id="{16B83F9E-22C9-45CA-9E85-070F1D3EF530}" type="datetime1">
               <a:rPr lang="ko-KR" altLang="en-US" smtClean="0"/>
-              <a:t>2026-03-19</a:t>
+              <a:t>2026-05-13</a:t>
             </a:fld>
             <a:endParaRPr lang="ko-KR" altLang="en-US"/>
           </a:p>
@@ -1608,7 +1608,7 @@
           <a:p>
             <a:fld id="{03278F45-FB3C-4C4D-B89A-7BC3F5F229F6}" type="datetime1">
               <a:rPr lang="ko-KR" altLang="en-US" smtClean="0"/>
-              <a:t>2026-03-19</a:t>
+              <a:t>2026-05-13</a:t>
             </a:fld>
             <a:endParaRPr lang="ko-KR" altLang="en-US"/>
           </a:p>
@@ -2001,7 +2001,7 @@
           <a:p>
             <a:fld id="{38FDAC3C-35A6-415C-9F03-738A6AC328B1}" type="datetime1">
               <a:rPr lang="ko-KR" altLang="en-US" smtClean="0"/>
-              <a:t>2026-03-19</a:t>
+              <a:t>2026-05-13</a:t>
             </a:fld>
             <a:endParaRPr lang="ko-KR" altLang="en-US"/>
           </a:p>
@@ -3595,7 +3595,7 @@
           <a:p>
             <a:fld id="{507A0DF1-AEE6-4B0D-89D2-351E7B3EF65C}" type="datetime1">
               <a:rPr lang="ko-KR" altLang="en-US" smtClean="0"/>
-              <a:t>2026-03-19</a:t>
+              <a:t>2026-05-13</a:t>
             </a:fld>
             <a:endParaRPr lang="ko-KR" altLang="en-US"/>
           </a:p>
@@ -4023,7 +4023,7 @@
           <a:p>
             <a:fld id="{CA93B8C9-630F-4D57-944D-04FD37CECCD3}" type="datetime1">
               <a:rPr lang="ko-KR" altLang="en-US" smtClean="0"/>
-              <a:t>2026-03-19</a:t>
+              <a:t>2026-05-13</a:t>
             </a:fld>
             <a:endParaRPr lang="ko-KR" altLang="en-US"/>
           </a:p>
@@ -4180,7 +4180,7 @@
           <a:p>
             <a:fld id="{E986165A-AC43-4902-9541-874ECD310BA3}" type="datetime1">
               <a:rPr lang="ko-KR" altLang="en-US" smtClean="0"/>
-              <a:t>2026-03-19</a:t>
+              <a:t>2026-05-13</a:t>
             </a:fld>
             <a:endParaRPr lang="ko-KR" altLang="en-US"/>
           </a:p>
@@ -4507,7 +4507,7 @@
           <a:p>
             <a:fld id="{47E6EE6D-2B0E-43A9-87A2-7354CDB998F4}" type="datetime1">
               <a:rPr lang="ko-KR" altLang="en-US" smtClean="0"/>
-              <a:t>2026-03-19</a:t>
+              <a:t>2026-05-13</a:t>
             </a:fld>
             <a:endParaRPr lang="ko-KR" altLang="en-US"/>
           </a:p>
@@ -4811,7 +4811,7 @@
           <a:p>
             <a:fld id="{5CC5944E-0BC8-4FAA-9F94-6B4B05834E10}" type="datetime1">
               <a:rPr lang="ko-KR" altLang="en-US" smtClean="0"/>
-              <a:t>2026-03-19</a:t>
+              <a:t>2026-05-13</a:t>
             </a:fld>
             <a:endParaRPr lang="ko-KR" altLang="en-US"/>
           </a:p>
@@ -8771,10 +8771,13 @@
                 <a14:m>
                   <m:oMath xmlns:m="http://schemas.openxmlformats.org/officeDocument/2006/math">
                     <m:r>
-                      <a:rPr lang="en-US" altLang="ko-KR" sz="1600" b="0" i="1" spc="-50" smtClean="0">
+                      <m:rPr>
+                        <m:sty m:val="p"/>
+                      </m:rPr>
+                      <a:rPr lang="en-US" altLang="ko-KR" sz="1600" b="0" i="0" spc="-50" smtClean="0">
                         <a:latin typeface="Cambria Math" panose="02040503050406030204" pitchFamily="18" charset="0"/>
                       </a:rPr>
-                      <m:t>𝑎</m:t>
+                      <m:t>a</m:t>
                     </m:r>
                   </m:oMath>
                 </a14:m>
@@ -8832,7 +8835,7 @@
               <a:blipFill>
                 <a:blip r:embed="rId2"/>
                 <a:stretch>
-                  <a:fillRect l="-433" b="-2050"/>
+                  <a:fillRect l="-433" r="-163" b="-2050"/>
                 </a:stretch>
               </a:blipFill>
             </p:spPr>
@@ -9655,15 +9658,7 @@
             </a:r>
             <a:r>
               <a:rPr lang="ko-KR" altLang="en-US" sz="1600" spc="-50" dirty="0"/>
-              <a:t> 서로 교차하여 명백한 판단을 내릴 수 </a:t>
-            </a:r>
-            <a:r>
-              <a:rPr lang="ko-KR" altLang="en-US" sz="1600" spc="-50" dirty="0" err="1"/>
-              <a:t>없는경우를</a:t>
-            </a:r>
-            <a:r>
-              <a:rPr lang="ko-KR" altLang="en-US" sz="1600" spc="-50" dirty="0"/>
-              <a:t> 많이 보게 된다</a:t>
+              <a:t> 서로 교차하여 명백한 판단을 내릴 수 없는 경우를 많이 보게 된다</a:t>
             </a:r>
             <a:r>
               <a:rPr lang="en-US" altLang="ko-KR" sz="1600" spc="-50" dirty="0"/>
@@ -9833,7 +9828,7 @@
             <p:spPr>
               <a:xfrm>
                 <a:off x="288790" y="958844"/>
-                <a:ext cx="11250267" cy="6616683"/>
+                <a:ext cx="11250267" cy="5508688"/>
               </a:xfrm>
               <a:prstGeom prst="rect">
                 <a:avLst/>
@@ -10653,36 +10648,6 @@
                 </a:r>
                 <a:endParaRPr lang="en-US" altLang="ko-KR" sz="1600" spc="-50" dirty="0"/>
               </a:p>
-              <a:p>
-                <a:pPr marL="1292225" lvl="2" indent="-285750">
-                  <a:lnSpc>
-                    <a:spcPct val="150000"/>
-                  </a:lnSpc>
-                  <a:buFont typeface="Wingdings" panose="05000000000000000000" pitchFamily="2" charset="2"/>
-                  <a:buChar char="Ø"/>
-                </a:pPr>
-                <a:endParaRPr lang="en-US" altLang="ko-KR" sz="1600" spc="-50" dirty="0"/>
-              </a:p>
-              <a:p>
-                <a:pPr marL="1292225" lvl="2" indent="-285750">
-                  <a:lnSpc>
-                    <a:spcPct val="150000"/>
-                  </a:lnSpc>
-                  <a:buFont typeface="Wingdings" panose="05000000000000000000" pitchFamily="2" charset="2"/>
-                  <a:buChar char="Ø"/>
-                </a:pPr>
-                <a:endParaRPr lang="en-US" altLang="ko-KR" sz="1600" spc="-50" dirty="0"/>
-              </a:p>
-              <a:p>
-                <a:pPr marL="835025" lvl="1" indent="-285750">
-                  <a:lnSpc>
-                    <a:spcPct val="150000"/>
-                  </a:lnSpc>
-                  <a:buFont typeface="Wingdings" panose="05000000000000000000" pitchFamily="2" charset="2"/>
-                  <a:buChar char="ü"/>
-                </a:pPr>
-                <a:endParaRPr lang="en-US" altLang="ko-KR" sz="1600" spc="-50" dirty="0"/>
-              </a:p>
             </p:txBody>
           </p:sp>
         </mc:Choice>
@@ -10704,7 +10669,7 @@
             <p:spPr>
               <a:xfrm>
                 <a:off x="288790" y="958844"/>
-                <a:ext cx="11250267" cy="6616683"/>
+                <a:ext cx="11250267" cy="5508688"/>
               </a:xfrm>
               <a:prstGeom prst="rect">
                 <a:avLst/>
@@ -10712,7 +10677,7 @@
               <a:blipFill>
                 <a:blip r:embed="rId2"/>
                 <a:stretch>
-                  <a:fillRect/>
+                  <a:fillRect b="-442"/>
                 </a:stretch>
               </a:blipFill>
             </p:spPr>
@@ -11218,7 +11183,7 @@
             <p:spPr>
               <a:xfrm>
                 <a:off x="288790" y="958844"/>
-                <a:ext cx="11250267" cy="3738011"/>
+                <a:ext cx="11250267" cy="3368679"/>
               </a:xfrm>
               <a:prstGeom prst="rect">
                 <a:avLst/>
@@ -11390,7 +11355,7 @@
                 </a:r>
                 <a:r>
                   <a:rPr lang="ko-KR" altLang="en-US" sz="1600" spc="-50" dirty="0"/>
-                  <a:t> 정확한 성격은 많이 알려지지 않은 것 같다</a:t>
+                  <a:t> 정확한 성격은 많이 알려지지 않았다</a:t>
                 </a:r>
                 <a:r>
                   <a:rPr lang="en-US" altLang="ko-KR" sz="1600" spc="-50" dirty="0"/>
@@ -11492,7 +11457,7 @@
             <p:spPr>
               <a:xfrm>
                 <a:off x="288790" y="958844"/>
-                <a:ext cx="11250267" cy="3738011"/>
+                <a:ext cx="11250267" cy="3368679"/>
               </a:xfrm>
               <a:prstGeom prst="rect">
                 <a:avLst/>
@@ -11500,7 +11465,7 @@
               <a:blipFill>
                 <a:blip r:embed="rId2"/>
                 <a:stretch>
-                  <a:fillRect r="-867" b="-1142"/>
+                  <a:fillRect r="-867" b="-1266"/>
                 </a:stretch>
               </a:blipFill>
             </p:spPr>
@@ -12356,43 +12321,6 @@
           </p:sp>
         </mc:Fallback>
       </mc:AlternateContent>
-      <p:pic>
-        <p:nvPicPr>
-          <p:cNvPr id="3" name="그림 2">
-            <a:extLst>
-              <a:ext uri="{FF2B5EF4-FFF2-40B4-BE49-F238E27FC236}">
-                <a16:creationId xmlns:a16="http://schemas.microsoft.com/office/drawing/2014/main" id="{7A5748BF-F976-797B-4801-F586BBC2F577}"/>
-              </a:ext>
-            </a:extLst>
-          </p:cNvPr>
-          <p:cNvPicPr>
-            <a:picLocks noChangeAspect="1"/>
-          </p:cNvPicPr>
-          <p:nvPr/>
-        </p:nvPicPr>
-        <p:blipFill>
-          <a:blip r:embed="rId4">
-            <a:extLst>
-              <a:ext uri="{28A0092B-C50C-407E-A947-70E740481C1C}">
-                <a14:useLocalDpi xmlns:a14="http://schemas.microsoft.com/office/drawing/2010/main" val="0"/>
-              </a:ext>
-            </a:extLst>
-          </a:blip>
-          <a:srcRect l="4304" t="17708" r="4456" b="18060"/>
-          <a:stretch>
-            <a:fillRect/>
-          </a:stretch>
-        </p:blipFill>
-        <p:spPr>
-          <a:xfrm>
-            <a:off x="6677721" y="4943727"/>
-            <a:ext cx="5268285" cy="1706422"/>
-          </a:xfrm>
-          <a:prstGeom prst="rect">
-            <a:avLst/>
-          </a:prstGeom>
-        </p:spPr>
-      </p:pic>
       <p:sp>
         <p:nvSpPr>
           <p:cNvPr id="6" name="TextBox 5">
@@ -12442,7 +12370,7 @@
             </a:r>
             <a:r>
               <a:rPr lang="en-US" altLang="ko-KR" sz="1600" spc="-50" dirty="0"/>
-              <a:t>2011</a:t>
+              <a:t>2015</a:t>
             </a:r>
             <a:r>
               <a:rPr lang="ko-KR" altLang="en-US" sz="1600" spc="-50" dirty="0"/>
@@ -12450,7 +12378,7 @@
             </a:r>
             <a:r>
               <a:rPr lang="en-US" altLang="ko-KR" sz="1600" spc="-50" dirty="0"/>
-              <a:t>0.388</a:t>
+              <a:t>0.35</a:t>
             </a:r>
             <a:r>
               <a:rPr lang="ko-KR" altLang="en-US" sz="1600" spc="-50" dirty="0"/>
@@ -12458,7 +12386,7 @@
             </a:r>
             <a:r>
               <a:rPr lang="en-US" altLang="ko-KR" sz="1600" spc="-50" dirty="0"/>
-              <a:t>2018</a:t>
+              <a:t>2023</a:t>
             </a:r>
             <a:r>
               <a:rPr lang="ko-KR" altLang="en-US" sz="1600" spc="-50" dirty="0"/>
@@ -12466,7 +12394,7 @@
             </a:r>
             <a:r>
               <a:rPr lang="en-US" altLang="ko-KR" sz="1600" spc="-50" dirty="0"/>
-              <a:t>0.345</a:t>
+              <a:t>0.323</a:t>
             </a:r>
             <a:r>
               <a:rPr lang="ko-KR" altLang="en-US" sz="1600" spc="-50" dirty="0"/>
@@ -12503,19 +12431,23 @@
             </a:r>
             <a:r>
               <a:rPr lang="en-US" altLang="ko-KR" sz="1600" spc="-50" dirty="0"/>
-              <a:t>8.32</a:t>
+              <a:t>6.81</a:t>
             </a:r>
             <a:r>
               <a:rPr lang="ko-KR" altLang="en-US" sz="1600" spc="-50" dirty="0"/>
               <a:t>에서 </a:t>
             </a:r>
             <a:r>
-              <a:rPr lang="en-US" altLang="ko-KR" sz="1600" spc="-50" dirty="0"/>
-              <a:t>6.54</a:t>
-            </a:r>
-            <a:r>
-              <a:rPr lang="ko-KR" altLang="en-US" sz="1600" spc="-50" dirty="0"/>
-              <a:t>까지 낮아졌다</a:t>
+              <a:rPr lang="en-US" altLang="ko-KR" sz="1600" spc="-50"/>
+              <a:t>5.72</a:t>
+            </a:r>
+            <a:r>
+              <a:rPr lang="ko-KR" altLang="en-US" sz="1600" spc="-50"/>
+              <a:t>까지 </a:t>
+            </a:r>
+            <a:r>
+              <a:rPr lang="ko-KR" altLang="en-US" sz="1600" spc="-50" dirty="0"/>
+              <a:t>낮아졌다</a:t>
             </a:r>
             <a:r>
               <a:rPr lang="en-US" altLang="ko-KR" sz="1600" spc="-50" dirty="0"/>
@@ -12587,6 +12519,43 @@
           </a:p>
         </p:txBody>
       </p:sp>
+      <p:pic>
+        <p:nvPicPr>
+          <p:cNvPr id="9" name="그림 8">
+            <a:extLst>
+              <a:ext uri="{FF2B5EF4-FFF2-40B4-BE49-F238E27FC236}">
+                <a16:creationId xmlns:a16="http://schemas.microsoft.com/office/drawing/2014/main" id="{5C3529D2-6F3A-4EA2-B636-EE64BA91C751}"/>
+              </a:ext>
+            </a:extLst>
+          </p:cNvPr>
+          <p:cNvPicPr>
+            <a:picLocks noChangeAspect="1"/>
+          </p:cNvPicPr>
+          <p:nvPr/>
+        </p:nvPicPr>
+        <p:blipFill>
+          <a:blip r:embed="rId4">
+            <a:extLst>
+              <a:ext uri="{28A0092B-C50C-407E-A947-70E740481C1C}">
+                <a14:useLocalDpi xmlns:a14="http://schemas.microsoft.com/office/drawing/2010/main" val="0"/>
+              </a:ext>
+            </a:extLst>
+          </a:blip>
+          <a:srcRect l="4590" t="17413" r="3592" b="17214"/>
+          <a:stretch>
+            <a:fillRect/>
+          </a:stretch>
+        </p:blipFill>
+        <p:spPr>
+          <a:xfrm>
+            <a:off x="6847826" y="5027053"/>
+            <a:ext cx="4782847" cy="1553229"/>
+          </a:xfrm>
+          <a:prstGeom prst="rect">
+            <a:avLst/>
+          </a:prstGeom>
+        </p:spPr>
+      </p:pic>
     </p:spTree>
     <p:extLst>
       <p:ext uri="{BB962C8B-B14F-4D97-AF65-F5344CB8AC3E}">
@@ -14450,7 +14419,15 @@
             </a:pPr>
             <a:r>
               <a:rPr lang="ko-KR" altLang="en-US" sz="1600" spc="-50" dirty="0"/>
-              <a:t>정부의 정책에 따라 분배상태가  달라질 수 있다</a:t>
+              <a:t>정부의 정책에 따라 </a:t>
+            </a:r>
+            <a:r>
+              <a:rPr lang="ko-KR" altLang="en-US" sz="1600" spc="-50"/>
+              <a:t>분배상태가 달라질 </a:t>
+            </a:r>
+            <a:r>
+              <a:rPr lang="ko-KR" altLang="en-US" sz="1600" spc="-50" dirty="0"/>
+              <a:t>수 있다</a:t>
             </a:r>
             <a:r>
               <a:rPr lang="en-US" altLang="ko-KR" sz="1600" spc="-50" dirty="0"/>
@@ -14643,7 +14620,7 @@
             </a:r>
             <a:r>
               <a:rPr lang="ko-KR" altLang="en-US" sz="1600" spc="-50" dirty="0"/>
-              <a:t>부정부패 등과 같은 사회적 여건도 분배상태애 영향을 준다</a:t>
+              <a:t>부정부패 등과 같은 사회적 여건도 분배상태에 영향을 준다</a:t>
             </a:r>
             <a:r>
               <a:rPr lang="en-US" altLang="ko-KR" sz="1600" spc="-50" dirty="0"/>
@@ -14837,7 +14814,7 @@
             </a:pPr>
             <a:r>
               <a:rPr lang="ko-KR" altLang="en-US" sz="1600" spc="-50" dirty="0"/>
-              <a:t>대부분의 일을 시장기능에 맡기는 순수한 자본주의체제보다 정부가 일정한 역할을 맡고 있는 혼합경제체제에서의 분배상태가  보다 </a:t>
+              <a:t>대부분의 일을 시장기능에 맡기는 순수한 자본주의체제보다 정부가 일정한 역할을 맡고 있는 혼합경제체제에서의 분배상태가 보다 </a:t>
             </a:r>
             <a:r>
               <a:rPr lang="ko-KR" altLang="en-US" sz="1600" spc="-50" dirty="0" err="1"/>
@@ -15749,7 +15726,7 @@
           <a:p>
             <a:r>
               <a:rPr lang="ko-KR" altLang="en-US" dirty="0"/>
-              <a:t>환경정책의 편익과 비용</a:t>
+              <a:t>분배의 정의</a:t>
             </a:r>
           </a:p>
         </p:txBody>
@@ -16229,27 +16206,27 @@
               <a:buChar char="ü"/>
             </a:pPr>
             <a:r>
-              <a:rPr lang="ko-KR" altLang="en-US" sz="1600" spc="-50" dirty="0"/>
-              <a:t>이를 토대로 모든 사람이 물질적 가치</a:t>
-            </a:r>
-            <a:r>
-              <a:rPr lang="en-US" altLang="ko-KR" sz="1600" spc="-50" dirty="0"/>
+              <a:rPr lang="ko-KR" altLang="en-US" sz="1600" spc="-100" dirty="0"/>
+              <a:t>이를 토대로 정의로운 분배는 모든 사람이 물질적 가치</a:t>
+            </a:r>
+            <a:r>
+              <a:rPr lang="en-US" altLang="ko-KR" sz="1600" spc="-100" dirty="0"/>
               <a:t> (</a:t>
             </a:r>
             <a:r>
-              <a:rPr lang="ko-KR" altLang="en-US" sz="1600" spc="-50" dirty="0"/>
+              <a:rPr lang="ko-KR" altLang="en-US" sz="1600" spc="-100" dirty="0"/>
               <a:t>재산과 소득</a:t>
             </a:r>
             <a:r>
-              <a:rPr lang="en-US" altLang="ko-KR" sz="1600" spc="-50" dirty="0"/>
+              <a:rPr lang="en-US" altLang="ko-KR" sz="1600" spc="-100" dirty="0"/>
               <a:t>)</a:t>
             </a:r>
             <a:r>
-              <a:rPr lang="ko-KR" altLang="en-US" sz="1600" spc="-50" dirty="0"/>
+              <a:rPr lang="ko-KR" altLang="en-US" sz="1600" spc="-100" dirty="0"/>
               <a:t>를 고루 나눠 가진 상태를 뜻한다는 결론을 도출한다</a:t>
             </a:r>
             <a:r>
-              <a:rPr lang="en-US" altLang="ko-KR" sz="1600" spc="-50" dirty="0"/>
+              <a:rPr lang="en-US" altLang="ko-KR" sz="1600" spc="-100" dirty="0"/>
               <a:t>.</a:t>
             </a:r>
           </a:p>
@@ -16984,15 +16961,7 @@
             </a:pPr>
             <a:r>
               <a:rPr lang="ko-KR" altLang="en-US" sz="1600" spc="-50" dirty="0"/>
-              <a:t>현실을 무조건 옹호할 </a:t>
-            </a:r>
-            <a:r>
-              <a:rPr lang="ko-KR" altLang="en-US" sz="1600" spc="-50" dirty="0" err="1"/>
-              <a:t>것이아니라</a:t>
-            </a:r>
-            <a:r>
-              <a:rPr lang="ko-KR" altLang="en-US" sz="1600" spc="-50" dirty="0"/>
-              <a:t> 냉철한 비판자의 면모를 보여야 한다는 것이다</a:t>
+              <a:t>현실을 무조건 옹호할 것이 아니라 냉철한 비판자의 면모를 보여야 한다는 것이다</a:t>
             </a:r>
             <a:r>
               <a:rPr lang="en-US" altLang="ko-KR" sz="1600" spc="-50" dirty="0"/>
@@ -17020,10 +16989,9 @@
               <a:t>구체적 방안을 제시하는 것이 필요하다</a:t>
             </a:r>
             <a:r>
-              <a:rPr lang="en-US" altLang="ko-KR" sz="1600" spc="-50"/>
+              <a:rPr lang="en-US" altLang="ko-KR" sz="1600" spc="-50" dirty="0"/>
               <a:t>.</a:t>
             </a:r>
-            <a:endParaRPr lang="en-US" altLang="ko-KR" sz="1600" spc="-50" dirty="0"/>
           </a:p>
         </p:txBody>
       </p:sp>

--- a/재정학/01_Lectures/재정학_Chapter_8.pptx
+++ b/재정학/01_Lectures/재정학_Chapter_8.pptx
@@ -243,7 +243,7 @@
           <a:p>
             <a:fld id="{4A5E00EF-AEA4-43E2-9451-8F9C59A39471}" type="datetimeFigureOut">
               <a:rPr lang="ko-KR" altLang="en-US" smtClean="0"/>
-              <a:t>2026-05-13</a:t>
+              <a:t>2026-05-14</a:t>
             </a:fld>
             <a:endParaRPr lang="ko-KR" altLang="en-US"/>
           </a:p>
@@ -665,7 +665,7 @@
           <a:p>
             <a:fld id="{CD32C56F-BD27-4999-9E6D-D4EACE3DA9F4}" type="datetime1">
               <a:rPr lang="ko-KR" altLang="en-US" smtClean="0"/>
-              <a:t>2026-05-13</a:t>
+              <a:t>2026-05-14</a:t>
             </a:fld>
             <a:endParaRPr lang="ko-KR" altLang="en-US"/>
           </a:p>
@@ -879,7 +879,7 @@
           <a:p>
             <a:fld id="{8EF4A19C-72C8-45CA-8E3F-68A7FA345D6C}" type="datetime1">
               <a:rPr lang="ko-KR" altLang="en-US" smtClean="0"/>
-              <a:t>2026-05-13</a:t>
+              <a:t>2026-05-14</a:t>
             </a:fld>
             <a:endParaRPr lang="ko-KR" altLang="en-US"/>
           </a:p>
@@ -1103,7 +1103,7 @@
           <a:p>
             <a:fld id="{56A175B2-010B-4341-954C-5F8F5C70B124}" type="datetime1">
               <a:rPr lang="ko-KR" altLang="en-US" smtClean="0"/>
-              <a:t>2026-05-13</a:t>
+              <a:t>2026-05-14</a:t>
             </a:fld>
             <a:endParaRPr lang="ko-KR" altLang="en-US"/>
           </a:p>
@@ -1317,7 +1317,7 @@
           <a:p>
             <a:fld id="{16B83F9E-22C9-45CA-9E85-070F1D3EF530}" type="datetime1">
               <a:rPr lang="ko-KR" altLang="en-US" smtClean="0"/>
-              <a:t>2026-05-13</a:t>
+              <a:t>2026-05-14</a:t>
             </a:fld>
             <a:endParaRPr lang="ko-KR" altLang="en-US"/>
           </a:p>
@@ -1608,7 +1608,7 @@
           <a:p>
             <a:fld id="{03278F45-FB3C-4C4D-B89A-7BC3F5F229F6}" type="datetime1">
               <a:rPr lang="ko-KR" altLang="en-US" smtClean="0"/>
-              <a:t>2026-05-13</a:t>
+              <a:t>2026-05-14</a:t>
             </a:fld>
             <a:endParaRPr lang="ko-KR" altLang="en-US"/>
           </a:p>
@@ -2001,7 +2001,7 @@
           <a:p>
             <a:fld id="{38FDAC3C-35A6-415C-9F03-738A6AC328B1}" type="datetime1">
               <a:rPr lang="ko-KR" altLang="en-US" smtClean="0"/>
-              <a:t>2026-05-13</a:t>
+              <a:t>2026-05-14</a:t>
             </a:fld>
             <a:endParaRPr lang="ko-KR" altLang="en-US"/>
           </a:p>
@@ -3595,7 +3595,7 @@
           <a:p>
             <a:fld id="{507A0DF1-AEE6-4B0D-89D2-351E7B3EF65C}" type="datetime1">
               <a:rPr lang="ko-KR" altLang="en-US" smtClean="0"/>
-              <a:t>2026-05-13</a:t>
+              <a:t>2026-05-14</a:t>
             </a:fld>
             <a:endParaRPr lang="ko-KR" altLang="en-US"/>
           </a:p>
@@ -4023,7 +4023,7 @@
           <a:p>
             <a:fld id="{CA93B8C9-630F-4D57-944D-04FD37CECCD3}" type="datetime1">
               <a:rPr lang="ko-KR" altLang="en-US" smtClean="0"/>
-              <a:t>2026-05-13</a:t>
+              <a:t>2026-05-14</a:t>
             </a:fld>
             <a:endParaRPr lang="ko-KR" altLang="en-US"/>
           </a:p>
@@ -4180,7 +4180,7 @@
           <a:p>
             <a:fld id="{E986165A-AC43-4902-9541-874ECD310BA3}" type="datetime1">
               <a:rPr lang="ko-KR" altLang="en-US" smtClean="0"/>
-              <a:t>2026-05-13</a:t>
+              <a:t>2026-05-14</a:t>
             </a:fld>
             <a:endParaRPr lang="ko-KR" altLang="en-US"/>
           </a:p>
@@ -4507,7 +4507,7 @@
           <a:p>
             <a:fld id="{47E6EE6D-2B0E-43A9-87A2-7354CDB998F4}" type="datetime1">
               <a:rPr lang="ko-KR" altLang="en-US" smtClean="0"/>
-              <a:t>2026-05-13</a:t>
+              <a:t>2026-05-14</a:t>
             </a:fld>
             <a:endParaRPr lang="ko-KR" altLang="en-US"/>
           </a:p>
@@ -4811,7 +4811,7 @@
           <a:p>
             <a:fld id="{5CC5944E-0BC8-4FAA-9F94-6B4B05834E10}" type="datetime1">
               <a:rPr lang="ko-KR" altLang="en-US" smtClean="0"/>
-              <a:t>2026-05-13</a:t>
+              <a:t>2026-05-14</a:t>
             </a:fld>
             <a:endParaRPr lang="ko-KR" altLang="en-US"/>
           </a:p>
@@ -15060,11 +15060,11 @@
             </a:pPr>
             <a:r>
               <a:rPr lang="ko-KR" altLang="en-US" sz="1600" spc="-50" dirty="0"/>
-              <a:t>지금까지 </a:t>
+              <a:t>지금까지 살펴 </a:t>
             </a:r>
             <a:r>
               <a:rPr lang="ko-KR" altLang="en-US" sz="1600" spc="-50" dirty="0" err="1"/>
-              <a:t>살펴본대로</a:t>
+              <a:t>본대로</a:t>
             </a:r>
             <a:r>
               <a:rPr lang="ko-KR" altLang="en-US" sz="1600" spc="-50" dirty="0"/>

--- a/재정학/01_Lectures/재정학_Chapter_8.pptx
+++ b/재정학/01_Lectures/재정학_Chapter_8.pptx
@@ -5,7 +5,7 @@
     <p:sldMasterId id="2147483648" r:id="rId1"/>
   </p:sldMasterIdLst>
   <p:notesMasterIdLst>
-    <p:notesMasterId r:id="rId27"/>
+    <p:notesMasterId r:id="rId29"/>
   </p:notesMasterIdLst>
   <p:sldIdLst>
     <p:sldId id="375" r:id="rId2"/>
@@ -25,14 +25,16 @@
     <p:sldId id="730" r:id="rId16"/>
     <p:sldId id="731" r:id="rId17"/>
     <p:sldId id="732" r:id="rId18"/>
-    <p:sldId id="721" r:id="rId19"/>
-    <p:sldId id="734" r:id="rId20"/>
-    <p:sldId id="735" r:id="rId21"/>
-    <p:sldId id="736" r:id="rId22"/>
-    <p:sldId id="737" r:id="rId23"/>
-    <p:sldId id="738" r:id="rId24"/>
-    <p:sldId id="739" r:id="rId25"/>
-    <p:sldId id="364" r:id="rId26"/>
+    <p:sldId id="733" r:id="rId19"/>
+    <p:sldId id="740" r:id="rId20"/>
+    <p:sldId id="721" r:id="rId21"/>
+    <p:sldId id="734" r:id="rId22"/>
+    <p:sldId id="735" r:id="rId23"/>
+    <p:sldId id="736" r:id="rId24"/>
+    <p:sldId id="737" r:id="rId25"/>
+    <p:sldId id="738" r:id="rId26"/>
+    <p:sldId id="739" r:id="rId27"/>
+    <p:sldId id="364" r:id="rId28"/>
   </p:sldIdLst>
   <p:sldSz cx="12192000" cy="6858000"/>
   <p:notesSz cx="6858000" cy="9144000"/>
@@ -243,7 +245,7 @@
           <a:p>
             <a:fld id="{4A5E00EF-AEA4-43E2-9451-8F9C59A39471}" type="datetimeFigureOut">
               <a:rPr lang="ko-KR" altLang="en-US" smtClean="0"/>
-              <a:t>2026-05-14</a:t>
+              <a:t>2026-05-18</a:t>
             </a:fld>
             <a:endParaRPr lang="ko-KR" altLang="en-US"/>
           </a:p>
@@ -665,7 +667,7 @@
           <a:p>
             <a:fld id="{CD32C56F-BD27-4999-9E6D-D4EACE3DA9F4}" type="datetime1">
               <a:rPr lang="ko-KR" altLang="en-US" smtClean="0"/>
-              <a:t>2026-05-14</a:t>
+              <a:t>2026-05-18</a:t>
             </a:fld>
             <a:endParaRPr lang="ko-KR" altLang="en-US"/>
           </a:p>
@@ -879,7 +881,7 @@
           <a:p>
             <a:fld id="{8EF4A19C-72C8-45CA-8E3F-68A7FA345D6C}" type="datetime1">
               <a:rPr lang="ko-KR" altLang="en-US" smtClean="0"/>
-              <a:t>2026-05-14</a:t>
+              <a:t>2026-05-18</a:t>
             </a:fld>
             <a:endParaRPr lang="ko-KR" altLang="en-US"/>
           </a:p>
@@ -1103,7 +1105,7 @@
           <a:p>
             <a:fld id="{56A175B2-010B-4341-954C-5F8F5C70B124}" type="datetime1">
               <a:rPr lang="ko-KR" altLang="en-US" smtClean="0"/>
-              <a:t>2026-05-14</a:t>
+              <a:t>2026-05-18</a:t>
             </a:fld>
             <a:endParaRPr lang="ko-KR" altLang="en-US"/>
           </a:p>
@@ -1317,7 +1319,7 @@
           <a:p>
             <a:fld id="{16B83F9E-22C9-45CA-9E85-070F1D3EF530}" type="datetime1">
               <a:rPr lang="ko-KR" altLang="en-US" smtClean="0"/>
-              <a:t>2026-05-14</a:t>
+              <a:t>2026-05-18</a:t>
             </a:fld>
             <a:endParaRPr lang="ko-KR" altLang="en-US"/>
           </a:p>
@@ -1608,7 +1610,7 @@
           <a:p>
             <a:fld id="{03278F45-FB3C-4C4D-B89A-7BC3F5F229F6}" type="datetime1">
               <a:rPr lang="ko-KR" altLang="en-US" smtClean="0"/>
-              <a:t>2026-05-14</a:t>
+              <a:t>2026-05-18</a:t>
             </a:fld>
             <a:endParaRPr lang="ko-KR" altLang="en-US"/>
           </a:p>
@@ -2001,7 +2003,7 @@
           <a:p>
             <a:fld id="{38FDAC3C-35A6-415C-9F03-738A6AC328B1}" type="datetime1">
               <a:rPr lang="ko-KR" altLang="en-US" smtClean="0"/>
-              <a:t>2026-05-14</a:t>
+              <a:t>2026-05-18</a:t>
             </a:fld>
             <a:endParaRPr lang="ko-KR" altLang="en-US"/>
           </a:p>
@@ -3595,7 +3597,7 @@
           <a:p>
             <a:fld id="{507A0DF1-AEE6-4B0D-89D2-351E7B3EF65C}" type="datetime1">
               <a:rPr lang="ko-KR" altLang="en-US" smtClean="0"/>
-              <a:t>2026-05-14</a:t>
+              <a:t>2026-05-18</a:t>
             </a:fld>
             <a:endParaRPr lang="ko-KR" altLang="en-US"/>
           </a:p>
@@ -4023,7 +4025,7 @@
           <a:p>
             <a:fld id="{CA93B8C9-630F-4D57-944D-04FD37CECCD3}" type="datetime1">
               <a:rPr lang="ko-KR" altLang="en-US" smtClean="0"/>
-              <a:t>2026-05-14</a:t>
+              <a:t>2026-05-18</a:t>
             </a:fld>
             <a:endParaRPr lang="ko-KR" altLang="en-US"/>
           </a:p>
@@ -4180,7 +4182,7 @@
           <a:p>
             <a:fld id="{E986165A-AC43-4902-9541-874ECD310BA3}" type="datetime1">
               <a:rPr lang="ko-KR" altLang="en-US" smtClean="0"/>
-              <a:t>2026-05-14</a:t>
+              <a:t>2026-05-18</a:t>
             </a:fld>
             <a:endParaRPr lang="ko-KR" altLang="en-US"/>
           </a:p>
@@ -4507,7 +4509,7 @@
           <a:p>
             <a:fld id="{47E6EE6D-2B0E-43A9-87A2-7354CDB998F4}" type="datetime1">
               <a:rPr lang="ko-KR" altLang="en-US" smtClean="0"/>
-              <a:t>2026-05-14</a:t>
+              <a:t>2026-05-18</a:t>
             </a:fld>
             <a:endParaRPr lang="ko-KR" altLang="en-US"/>
           </a:p>
@@ -4811,7 +4813,7 @@
           <a:p>
             <a:fld id="{5CC5944E-0BC8-4FAA-9F94-6B4B05834E10}" type="datetime1">
               <a:rPr lang="ko-KR" altLang="en-US" smtClean="0"/>
-              <a:t>2026-05-14</a:t>
+              <a:t>2026-05-18</a:t>
             </a:fld>
             <a:endParaRPr lang="ko-KR" altLang="en-US"/>
           </a:p>
@@ -12074,8 +12076,8 @@
           </p:sp>
         </mc:Fallback>
       </mc:AlternateContent>
-      <mc:AlternateContent xmlns:mc="http://schemas.openxmlformats.org/markup-compatibility/2006" xmlns:a14="http://schemas.microsoft.com/office/drawing/2010/main">
-        <mc:Choice Requires="a14">
+      <mc:AlternateContent xmlns:mc="http://schemas.openxmlformats.org/markup-compatibility/2006">
+        <mc:Choice xmlns:a14="http://schemas.microsoft.com/office/drawing/2010/main" Requires="a14">
           <p:sp>
             <p:nvSpPr>
               <p:cNvPr id="8" name="TextBox 7">
@@ -12255,6 +12257,12 @@
                             <m:t>유</m:t>
                           </m:r>
                           <m:r>
+                            <a:rPr lang="en-US" altLang="ko-KR" b="0" i="1" spc="-50" smtClean="0">
+                              <a:latin typeface="Cambria Math" panose="02040503050406030204" pitchFamily="18" charset="0"/>
+                            </a:rPr>
+                            <m:t> </m:t>
+                          </m:r>
+                          <m:r>
                             <a:rPr lang="ko-KR" altLang="en-US" i="1" spc="-50">
                               <a:latin typeface="Cambria Math" panose="02040503050406030204" pitchFamily="18" charset="0"/>
                             </a:rPr>
@@ -12276,7 +12284,7 @@
             </p:txBody>
           </p:sp>
         </mc:Choice>
-        <mc:Fallback xmlns="">
+        <mc:Fallback>
           <p:sp>
             <p:nvSpPr>
               <p:cNvPr id="8" name="TextBox 7">
@@ -12577,7 +12585,7 @@
         <p:cNvPr id="1" name="">
           <a:extLst>
             <a:ext uri="{FF2B5EF4-FFF2-40B4-BE49-F238E27FC236}">
-              <a16:creationId xmlns:a16="http://schemas.microsoft.com/office/drawing/2014/main" id="{000D1EC5-A470-8A1E-5DCF-1E04A904FCDD}"/>
+              <a16:creationId xmlns:a16="http://schemas.microsoft.com/office/drawing/2014/main" id="{98DA6D79-DA12-AD01-644B-B2CF67C7DC7B}"/>
             </a:ext>
           </a:extLst>
         </p:cNvPr>
@@ -12592,49 +12600,44 @@
           <a:chExt cx="0" cy="0"/>
         </a:xfrm>
       </p:grpSpPr>
-      <p:pic>
-        <p:nvPicPr>
-          <p:cNvPr id="6" name="그림 5" descr="텍스트, 로고, 원, 폰트이(가) 표시된 사진&#10;&#10;AI 생성 콘텐츠는 정확하지 않을 수 있습니다.">
+      <p:sp>
+        <p:nvSpPr>
+          <p:cNvPr id="2" name="제목 1">
             <a:extLst>
               <a:ext uri="{FF2B5EF4-FFF2-40B4-BE49-F238E27FC236}">
-                <a16:creationId xmlns:a16="http://schemas.microsoft.com/office/drawing/2014/main" id="{FE1FA9FD-0CB3-0347-F9C2-F0B5D5A337FD}"/>
+                <a16:creationId xmlns:a16="http://schemas.microsoft.com/office/drawing/2014/main" id="{B09C53A6-FF5E-185B-2001-0B7F5D11B634}"/>
               </a:ext>
             </a:extLst>
           </p:cNvPr>
-          <p:cNvPicPr>
-            <a:picLocks noChangeAspect="1"/>
-          </p:cNvPicPr>
-          <p:nvPr/>
-        </p:nvPicPr>
-        <p:blipFill>
-          <a:blip r:embed="rId2">
-            <a:alphaModFix amt="20000"/>
-            <a:extLst>
-              <a:ext uri="{28A0092B-C50C-407E-A947-70E740481C1C}">
-                <a14:useLocalDpi xmlns:a14="http://schemas.microsoft.com/office/drawing/2010/main" val="0"/>
-              </a:ext>
-            </a:extLst>
-          </a:blip>
-          <a:stretch>
-            <a:fillRect/>
-          </a:stretch>
-        </p:blipFill>
-        <p:spPr>
-          <a:xfrm>
-            <a:off x="4012070" y="1673061"/>
-            <a:ext cx="4167861" cy="4167861"/>
-          </a:xfrm>
-          <a:prstGeom prst="rect">
-            <a:avLst/>
-          </a:prstGeom>
-        </p:spPr>
-      </p:pic>
+          <p:cNvSpPr>
+            <a:spLocks noGrp="1"/>
+          </p:cNvSpPr>
+          <p:nvPr>
+            <p:ph type="title"/>
+          </p:nvPr>
+        </p:nvSpPr>
+        <p:spPr/>
+        <p:txBody>
+          <a:bodyPr/>
+          <a:lstStyle/>
+          <a:p>
+            <a:r>
+              <a:rPr lang="ko-KR" altLang="en-US" dirty="0" err="1"/>
+              <a:t>앳킨슨</a:t>
+            </a:r>
+            <a:r>
+              <a:rPr lang="ko-KR" altLang="en-US" dirty="0"/>
+              <a:t> 지수</a:t>
+            </a:r>
+          </a:p>
+        </p:txBody>
+      </p:sp>
       <p:sp>
         <p:nvSpPr>
           <p:cNvPr id="4" name="슬라이드 번호 개체 틀 3">
             <a:extLst>
               <a:ext uri="{FF2B5EF4-FFF2-40B4-BE49-F238E27FC236}">
-                <a16:creationId xmlns:a16="http://schemas.microsoft.com/office/drawing/2014/main" id="{E16C89AD-4657-B5E9-DF15-42E8C5FB7B83}"/>
+                <a16:creationId xmlns:a16="http://schemas.microsoft.com/office/drawing/2014/main" id="{021177FA-D460-B652-89C8-677C69C77738}"/>
               </a:ext>
             </a:extLst>
           </p:cNvPr>
@@ -12658,51 +12661,569 @@
           </a:p>
         </p:txBody>
       </p:sp>
-      <p:sp>
-        <p:nvSpPr>
-          <p:cNvPr id="7" name="제목 1">
-            <a:extLst>
-              <a:ext uri="{FF2B5EF4-FFF2-40B4-BE49-F238E27FC236}">
-                <a16:creationId xmlns:a16="http://schemas.microsoft.com/office/drawing/2014/main" id="{369F4F89-EECA-252F-74CA-0DD0D19AEA04}"/>
-              </a:ext>
-            </a:extLst>
-          </p:cNvPr>
-          <p:cNvSpPr>
-            <a:spLocks noGrp="1"/>
-          </p:cNvSpPr>
-          <p:nvPr>
-            <p:ph type="title"/>
-          </p:nvPr>
-        </p:nvSpPr>
-        <p:spPr>
-          <a:xfrm>
-            <a:off x="831850" y="3765550"/>
-            <a:ext cx="11150600" cy="652818"/>
-          </a:xfrm>
-          <a:effectLst>
-            <a:reflection blurRad="50800" stA="45000" endPos="44000" dir="5400000" sy="-100000" algn="bl" rotWithShape="0"/>
-          </a:effectLst>
-        </p:spPr>
-        <p:txBody>
-          <a:bodyPr anchor="b"/>
-          <a:lstStyle/>
-          <a:p>
-            <a:r>
-              <a:rPr lang="en-US" altLang="ko-KR" sz="4000" b="1" i="0" spc="150" dirty="0"/>
-              <a:t>Section 4. </a:t>
-            </a:r>
-            <a:r>
-              <a:rPr lang="ko-KR" altLang="en-US" sz="4000" b="1" i="0" spc="150" dirty="0"/>
-              <a:t>불평등 발생의 원인</a:t>
-            </a:r>
-            <a:endParaRPr lang="ko-KR" altLang="en-US" sz="3600" i="0" spc="150" dirty="0"/>
-          </a:p>
-        </p:txBody>
-      </p:sp>
+      <mc:AlternateContent xmlns:mc="http://schemas.openxmlformats.org/markup-compatibility/2006" xmlns:a14="http://schemas.microsoft.com/office/drawing/2010/main">
+        <mc:Choice Requires="a14">
+          <p:sp>
+            <p:nvSpPr>
+              <p:cNvPr id="5" name="TextBox 4">
+                <a:extLst>
+                  <a:ext uri="{FF2B5EF4-FFF2-40B4-BE49-F238E27FC236}">
+                    <a16:creationId xmlns:a16="http://schemas.microsoft.com/office/drawing/2014/main" id="{252E5C67-F822-E779-DA23-CD2BD99926D1}"/>
+                  </a:ext>
+                </a:extLst>
+              </p:cNvPr>
+              <p:cNvSpPr txBox="1"/>
+              <p:nvPr/>
+            </p:nvSpPr>
+            <p:spPr>
+              <a:xfrm>
+                <a:off x="288790" y="958844"/>
+                <a:ext cx="11250267" cy="4547848"/>
+              </a:xfrm>
+              <a:prstGeom prst="rect">
+                <a:avLst/>
+              </a:prstGeom>
+              <a:noFill/>
+            </p:spPr>
+            <p:txBody>
+              <a:bodyPr wrap="square" rtlCol="0" anchor="t">
+                <a:spAutoFit/>
+              </a:bodyPr>
+              <a:lstStyle/>
+              <a:p>
+                <a:pPr marL="377825" indent="-285750">
+                  <a:lnSpc>
+                    <a:spcPct val="150000"/>
+                  </a:lnSpc>
+                  <a:buFont typeface="Arial" panose="020B0604020202020204" pitchFamily="34" charset="0"/>
+                  <a:buChar char="•"/>
+                </a:pPr>
+                <a:r>
+                  <a:rPr lang="ko-KR" altLang="en-US" sz="1600" spc="-50" dirty="0"/>
+                  <a:t>앳킨슨</a:t>
+                </a:r>
+                <a:r>
+                  <a:rPr lang="en-US" altLang="ko-KR" sz="1600" spc="-50" dirty="0"/>
+                  <a:t>(A. Atkinson, 1970)</a:t>
+                </a:r>
+                <a:r>
+                  <a:rPr lang="ko-KR" altLang="en-US" sz="1600" spc="-50" dirty="0"/>
+                  <a:t>은 기존의 불평등지수는 특정한 가치판단 혹은 사회후생함수를 내포하고 있는데</a:t>
+                </a:r>
+                <a:r>
+                  <a:rPr lang="en-US" altLang="ko-KR" sz="1600" spc="-50" dirty="0"/>
+                  <a:t>, </a:t>
+                </a:r>
+                <a:r>
+                  <a:rPr lang="ko-KR" altLang="en-US" sz="1600" spc="-50" dirty="0"/>
+                  <a:t>그 사회후생함수의 성격에 문제가 있는 경우가 대부분이라고 지적한다</a:t>
+                </a:r>
+                <a:r>
+                  <a:rPr lang="en-US" altLang="ko-KR" sz="1600" spc="-50" dirty="0"/>
+                  <a:t>.</a:t>
+                </a:r>
+              </a:p>
+              <a:p>
+                <a:pPr marL="835025" lvl="1" indent="-285750">
+                  <a:lnSpc>
+                    <a:spcPct val="150000"/>
+                  </a:lnSpc>
+                  <a:buFont typeface="Wingdings" panose="05000000000000000000" pitchFamily="2" charset="2"/>
+                  <a:buChar char="ü"/>
+                </a:pPr>
+                <a:r>
+                  <a:rPr lang="ko-KR" altLang="en-US" sz="1600" spc="-50" dirty="0"/>
+                  <a:t>이 점을 고려하여 사회후생함수가 명확히 드러날 수 있는 성격을 가진 새로운 </a:t>
+                </a:r>
+                <a:r>
+                  <a:rPr lang="ko-KR" altLang="en-US" sz="1600" spc="-50" dirty="0" err="1"/>
+                  <a:t>불평등도지수를</a:t>
+                </a:r>
+                <a:r>
+                  <a:rPr lang="ko-KR" altLang="en-US" sz="1600" spc="-50" dirty="0"/>
+                  <a:t> 개발했다</a:t>
+                </a:r>
+                <a:r>
+                  <a:rPr lang="en-US" altLang="ko-KR" sz="1600" spc="-50" dirty="0"/>
+                  <a:t>.</a:t>
+                </a:r>
+              </a:p>
+              <a:p>
+                <a:pPr marL="377825" indent="-285750">
+                  <a:lnSpc>
+                    <a:spcPct val="150000"/>
+                  </a:lnSpc>
+                  <a:buFont typeface="Arial" panose="020B0604020202020204" pitchFamily="34" charset="0"/>
+                  <a:buChar char="•"/>
+                </a:pPr>
+                <a:r>
+                  <a:rPr lang="ko-KR" altLang="en-US" sz="1600" spc="-50" dirty="0"/>
+                  <a:t>그는 우선 </a:t>
+                </a:r>
+                <a:r>
+                  <a:rPr lang="ko-KR" altLang="en-US" sz="1600" spc="-50" dirty="0" err="1"/>
+                  <a:t>균등분배대등소득</a:t>
+                </a:r>
+                <a:r>
+                  <a:rPr lang="ko-KR" altLang="en-US" sz="1600" spc="-50" dirty="0"/>
+                  <a:t> </a:t>
+                </a:r>
+                <a:r>
+                  <a:rPr lang="en-US" altLang="ko-KR" sz="1600" spc="-50" dirty="0"/>
+                  <a:t>(equally distributed equivalent income) </a:t>
+                </a:r>
+                <a14:m>
+                  <m:oMath xmlns:m="http://schemas.openxmlformats.org/officeDocument/2006/math">
+                    <m:sSub>
+                      <m:sSubPr>
+                        <m:ctrlPr>
+                          <a:rPr lang="en-US" altLang="ko-KR" sz="1600" i="1" spc="-50" smtClean="0">
+                            <a:latin typeface="Cambria Math" panose="02040503050406030204" pitchFamily="18" charset="0"/>
+                          </a:rPr>
+                        </m:ctrlPr>
+                      </m:sSubPr>
+                      <m:e>
+                        <m:r>
+                          <a:rPr lang="en-US" altLang="ko-KR" sz="1600" b="0" i="1" spc="-50" smtClean="0">
+                            <a:latin typeface="Cambria Math" panose="02040503050406030204" pitchFamily="18" charset="0"/>
+                          </a:rPr>
+                          <m:t>𝑌</m:t>
+                        </m:r>
+                      </m:e>
+                      <m:sub>
+                        <m:r>
+                          <a:rPr lang="en-US" altLang="ko-KR" sz="1600" b="0" i="1" spc="-50" smtClean="0">
+                            <a:latin typeface="Cambria Math" panose="02040503050406030204" pitchFamily="18" charset="0"/>
+                          </a:rPr>
+                          <m:t>𝑒</m:t>
+                        </m:r>
+                      </m:sub>
+                    </m:sSub>
+                  </m:oMath>
+                </a14:m>
+                <a:r>
+                  <a:rPr lang="ko-KR" altLang="en-US" sz="1600" spc="-50" dirty="0"/>
+                  <a:t>를 다음과 같이 정의하고 있다</a:t>
+                </a:r>
+                <a:r>
+                  <a:rPr lang="en-US" altLang="ko-KR" sz="1600" spc="-50" dirty="0"/>
+                  <a:t>.</a:t>
+                </a:r>
+              </a:p>
+              <a:p>
+                <a:pPr marL="377825" indent="-285750">
+                  <a:lnSpc>
+                    <a:spcPct val="150000"/>
+                  </a:lnSpc>
+                  <a:buFont typeface="Arial" panose="020B0604020202020204" pitchFamily="34" charset="0"/>
+                  <a:buChar char="•"/>
+                </a:pPr>
+                <a:r>
+                  <a:rPr lang="ko-KR" altLang="en-US" sz="1600" b="1" spc="-50" dirty="0" err="1"/>
+                  <a:t>균등분배대등소득</a:t>
+                </a:r>
+                <a:r>
+                  <a:rPr lang="en-US" altLang="ko-KR" sz="1600" b="1" spc="-50" dirty="0"/>
+                  <a:t>:</a:t>
+                </a:r>
+                <a:r>
+                  <a:rPr lang="en-US" altLang="ko-KR" sz="1600" spc="-50" dirty="0"/>
+                  <a:t> 1</a:t>
+                </a:r>
+                <a:r>
+                  <a:rPr lang="ko-KR" altLang="en-US" sz="1600" spc="-50" dirty="0"/>
+                  <a:t>인당 평균소득이 </a:t>
+                </a:r>
+                <a14:m>
+                  <m:oMath xmlns:m="http://schemas.openxmlformats.org/officeDocument/2006/math">
+                    <m:bar>
+                      <m:barPr>
+                        <m:pos m:val="top"/>
+                        <m:ctrlPr>
+                          <a:rPr lang="en-US" altLang="ko-KR" sz="1600" i="1" spc="-50" smtClean="0">
+                            <a:latin typeface="Cambria Math" panose="02040503050406030204" pitchFamily="18" charset="0"/>
+                          </a:rPr>
+                        </m:ctrlPr>
+                      </m:barPr>
+                      <m:e>
+                        <m:r>
+                          <a:rPr lang="en-US" altLang="ko-KR" sz="1600" b="0" i="1" spc="-50" smtClean="0">
+                            <a:latin typeface="Cambria Math" panose="02040503050406030204" pitchFamily="18" charset="0"/>
+                          </a:rPr>
+                          <m:t>𝑌</m:t>
+                        </m:r>
+                      </m:e>
+                    </m:bar>
+                  </m:oMath>
+                </a14:m>
+                <a:r>
+                  <a:rPr lang="ko-KR" altLang="en-US" sz="1600" spc="-50" dirty="0"/>
+                  <a:t>로 주어진 사회에서 소득이 어떤 특정한 상태로 사람들 사이에 분배된 결과 </a:t>
+                </a:r>
+                <a14:m>
+                  <m:oMath xmlns:m="http://schemas.openxmlformats.org/officeDocument/2006/math">
+                    <m:acc>
+                      <m:accPr>
+                        <m:chr m:val="̂"/>
+                        <m:ctrlPr>
+                          <a:rPr lang="ko-KR" altLang="en-US" sz="1600" i="1" spc="-50" smtClean="0">
+                            <a:latin typeface="Cambria Math" panose="02040503050406030204" pitchFamily="18" charset="0"/>
+                          </a:rPr>
+                        </m:ctrlPr>
+                      </m:accPr>
+                      <m:e>
+                        <m:r>
+                          <a:rPr lang="en-US" altLang="ko-KR" sz="1600" b="0" i="1" spc="-50" smtClean="0">
+                            <a:latin typeface="Cambria Math" panose="02040503050406030204" pitchFamily="18" charset="0"/>
+                          </a:rPr>
+                          <m:t>𝑊</m:t>
+                        </m:r>
+                      </m:e>
+                    </m:acc>
+                  </m:oMath>
+                </a14:m>
+                <a:r>
+                  <a:rPr lang="ko-KR" altLang="en-US" sz="1600" spc="-50" dirty="0"/>
+                  <a:t>의 사회후생수준이 달성되었다고 하자</a:t>
+                </a:r>
+                <a:r>
+                  <a:rPr lang="en-US" altLang="ko-KR" sz="1600" spc="-50" dirty="0"/>
+                  <a:t>. </a:t>
+                </a:r>
+                <a:r>
+                  <a:rPr lang="ko-KR" altLang="en-US" sz="1600" spc="-50" dirty="0"/>
+                  <a:t>그런데 모든 사람에게</a:t>
+                </a:r>
+                <a:r>
+                  <a:rPr lang="en-US" altLang="ko-KR" sz="1600" spc="-50" dirty="0"/>
+                  <a:t> </a:t>
+                </a:r>
+                <a14:m>
+                  <m:oMath xmlns:m="http://schemas.openxmlformats.org/officeDocument/2006/math">
+                    <m:sSub>
+                      <m:sSubPr>
+                        <m:ctrlPr>
+                          <a:rPr lang="en-US" altLang="ko-KR" sz="1600" i="1" spc="-50">
+                            <a:latin typeface="Cambria Math" panose="02040503050406030204" pitchFamily="18" charset="0"/>
+                          </a:rPr>
+                        </m:ctrlPr>
+                      </m:sSubPr>
+                      <m:e>
+                        <m:r>
+                          <a:rPr lang="en-US" altLang="ko-KR" sz="1600" i="1" spc="-50">
+                            <a:latin typeface="Cambria Math" panose="02040503050406030204" pitchFamily="18" charset="0"/>
+                          </a:rPr>
+                          <m:t>𝑌</m:t>
+                        </m:r>
+                      </m:e>
+                      <m:sub>
+                        <m:r>
+                          <a:rPr lang="en-US" altLang="ko-KR" sz="1600" i="1" spc="-50">
+                            <a:latin typeface="Cambria Math" panose="02040503050406030204" pitchFamily="18" charset="0"/>
+                          </a:rPr>
+                          <m:t>𝑒</m:t>
+                        </m:r>
+                      </m:sub>
+                    </m:sSub>
+                  </m:oMath>
+                </a14:m>
+                <a:r>
+                  <a:rPr lang="ko-KR" altLang="en-US" sz="1600" spc="-50" dirty="0"/>
+                  <a:t>씩의 소득을 균등하게 분배해 줄 때 그 경우와 똑같이 </a:t>
+                </a:r>
+                <a14:m>
+                  <m:oMath xmlns:m="http://schemas.openxmlformats.org/officeDocument/2006/math">
+                    <m:acc>
+                      <m:accPr>
+                        <m:chr m:val="̂"/>
+                        <m:ctrlPr>
+                          <a:rPr lang="ko-KR" altLang="en-US" sz="1600" i="1" spc="-50">
+                            <a:latin typeface="Cambria Math" panose="02040503050406030204" pitchFamily="18" charset="0"/>
+                          </a:rPr>
+                        </m:ctrlPr>
+                      </m:accPr>
+                      <m:e>
+                        <m:r>
+                          <a:rPr lang="en-US" altLang="ko-KR" sz="1600" i="1" spc="-50">
+                            <a:latin typeface="Cambria Math" panose="02040503050406030204" pitchFamily="18" charset="0"/>
+                          </a:rPr>
+                          <m:t>𝑊</m:t>
+                        </m:r>
+                      </m:e>
+                    </m:acc>
+                  </m:oMath>
+                </a14:m>
+                <a:r>
+                  <a:rPr lang="ko-KR" altLang="en-US" sz="1600" spc="-50" dirty="0"/>
+                  <a:t>의 사회후생수준이 달성될 수 있다면</a:t>
+                </a:r>
+                <a:r>
+                  <a:rPr lang="en-US" altLang="ko-KR" sz="1600" spc="-50" dirty="0"/>
+                  <a:t>, </a:t>
+                </a:r>
+                <a:r>
+                  <a:rPr lang="ko-KR" altLang="en-US" sz="1600" spc="-50" dirty="0"/>
+                  <a:t>우리는 바로 이 소득수준을 </a:t>
+                </a:r>
+                <a:r>
+                  <a:rPr lang="ko-KR" altLang="en-US" sz="1600" spc="-50" dirty="0" err="1"/>
+                  <a:t>균등분배대등소득</a:t>
+                </a:r>
+                <a:r>
+                  <a:rPr lang="ko-KR" altLang="en-US" sz="1600" spc="-50" dirty="0"/>
+                  <a:t> 이라고 정의한다</a:t>
+                </a:r>
+                <a:r>
+                  <a:rPr lang="en-US" altLang="ko-KR" sz="1600" spc="-50" dirty="0"/>
+                  <a:t>.</a:t>
+                </a:r>
+              </a:p>
+              <a:p>
+                <a:pPr marL="835025" lvl="1" indent="-285750">
+                  <a:lnSpc>
+                    <a:spcPct val="150000"/>
+                  </a:lnSpc>
+                  <a:buFont typeface="Wingdings" panose="05000000000000000000" pitchFamily="2" charset="2"/>
+                  <a:buChar char="ü"/>
+                </a:pPr>
+                <a:r>
+                  <a:rPr lang="ko-KR" altLang="en-US" sz="1600" spc="-50" dirty="0"/>
+                  <a:t>예를 들면 우리나라의 </a:t>
+                </a:r>
+                <a:r>
+                  <a:rPr lang="en-US" altLang="ko-KR" sz="1600" spc="-50" dirty="0"/>
+                  <a:t>1</a:t>
+                </a:r>
+                <a:r>
+                  <a:rPr lang="ko-KR" altLang="en-US" sz="1600" spc="-50" dirty="0"/>
+                  <a:t>인당 평균소득이 </a:t>
+                </a:r>
+                <a:r>
+                  <a:rPr lang="en-US" altLang="ko-KR" sz="1600" spc="-50" dirty="0"/>
+                  <a:t>3</a:t>
+                </a:r>
+                <a:r>
+                  <a:rPr lang="ko-KR" altLang="en-US" sz="1600" spc="-50" dirty="0"/>
+                  <a:t>만달러 인데</a:t>
+                </a:r>
+                <a:r>
+                  <a:rPr lang="en-US" altLang="ko-KR" sz="1600" spc="-50" dirty="0"/>
+                  <a:t>, </a:t>
+                </a:r>
+                <a:r>
+                  <a:rPr lang="ko-KR" altLang="en-US" sz="1600" spc="-50" dirty="0"/>
+                  <a:t>소득이 현재 상태로 분배되어 </a:t>
+                </a:r>
+                <a14:m>
+                  <m:oMath xmlns:m="http://schemas.openxmlformats.org/officeDocument/2006/math">
+                    <m:acc>
+                      <m:accPr>
+                        <m:chr m:val="̂"/>
+                        <m:ctrlPr>
+                          <a:rPr lang="ko-KR" altLang="en-US" sz="1600" i="1" spc="-50">
+                            <a:latin typeface="Cambria Math" panose="02040503050406030204" pitchFamily="18" charset="0"/>
+                          </a:rPr>
+                        </m:ctrlPr>
+                      </m:accPr>
+                      <m:e>
+                        <m:r>
+                          <a:rPr lang="en-US" altLang="ko-KR" sz="1600" i="1" spc="-50">
+                            <a:latin typeface="Cambria Math" panose="02040503050406030204" pitchFamily="18" charset="0"/>
+                          </a:rPr>
+                          <m:t>𝑊</m:t>
+                        </m:r>
+                      </m:e>
+                    </m:acc>
+                  </m:oMath>
+                </a14:m>
+                <a:r>
+                  <a:rPr lang="ko-KR" altLang="en-US" sz="1600" spc="-50" dirty="0"/>
+                  <a:t>의 사회후생수준을 달성했다고 하자</a:t>
+                </a:r>
+                <a:r>
+                  <a:rPr lang="en-US" altLang="ko-KR" sz="1600" spc="-50" dirty="0"/>
+                  <a:t>. </a:t>
+                </a:r>
+                <a:r>
+                  <a:rPr lang="ko-KR" altLang="en-US" sz="1600" spc="-50" dirty="0"/>
+                  <a:t>이 때 만약 </a:t>
+                </a:r>
+                <a:r>
+                  <a:rPr lang="en-US" altLang="ko-KR" sz="1600" spc="-50" dirty="0"/>
+                  <a:t>1</a:t>
+                </a:r>
+                <a:r>
+                  <a:rPr lang="ko-KR" altLang="en-US" sz="1600" spc="-50" dirty="0"/>
+                  <a:t>인당 </a:t>
+                </a:r>
+                <a:r>
+                  <a:rPr lang="en-US" altLang="ko-KR" sz="1600" spc="-50" dirty="0"/>
+                  <a:t>2</a:t>
+                </a:r>
+                <a:r>
+                  <a:rPr lang="ko-KR" altLang="en-US" sz="1600" spc="-50" dirty="0"/>
+                  <a:t>만 </a:t>
+                </a:r>
+                <a:r>
+                  <a:rPr lang="en-US" altLang="ko-KR" sz="1600" spc="-50" dirty="0"/>
+                  <a:t>5</a:t>
+                </a:r>
+                <a:r>
+                  <a:rPr lang="ko-KR" altLang="en-US" sz="1600" spc="-50" dirty="0"/>
+                  <a:t>천달러씩 균등하게 분배함으로써 </a:t>
+                </a:r>
+                <a14:m>
+                  <m:oMath xmlns:m="http://schemas.openxmlformats.org/officeDocument/2006/math">
+                    <m:acc>
+                      <m:accPr>
+                        <m:chr m:val="̂"/>
+                        <m:ctrlPr>
+                          <a:rPr lang="ko-KR" altLang="en-US" sz="1600" i="1" spc="-50">
+                            <a:latin typeface="Cambria Math" panose="02040503050406030204" pitchFamily="18" charset="0"/>
+                          </a:rPr>
+                        </m:ctrlPr>
+                      </m:accPr>
+                      <m:e>
+                        <m:r>
+                          <a:rPr lang="en-US" altLang="ko-KR" sz="1600" i="1" spc="-50">
+                            <a:latin typeface="Cambria Math" panose="02040503050406030204" pitchFamily="18" charset="0"/>
+                          </a:rPr>
+                          <m:t>𝑊</m:t>
+                        </m:r>
+                      </m:e>
+                    </m:acc>
+                  </m:oMath>
+                </a14:m>
+                <a:r>
+                  <a:rPr lang="ko-KR" altLang="en-US" sz="1600" spc="-50" dirty="0"/>
+                  <a:t>의 사회후생을 달성할 수 있다면</a:t>
+                </a:r>
+                <a:r>
+                  <a:rPr lang="en-US" altLang="ko-KR" sz="1600" spc="-50" dirty="0"/>
+                  <a:t>, </a:t>
+                </a:r>
+                <a:r>
+                  <a:rPr lang="ko-KR" altLang="en-US" sz="1600" spc="-50" dirty="0"/>
+                  <a:t>바로 이 </a:t>
+                </a:r>
+                <a:r>
+                  <a:rPr lang="en-US" altLang="ko-KR" sz="1600" spc="-50" dirty="0"/>
+                  <a:t>2</a:t>
+                </a:r>
+                <a:r>
+                  <a:rPr lang="ko-KR" altLang="en-US" sz="1600" spc="-50" dirty="0"/>
+                  <a:t>만 </a:t>
+                </a:r>
+                <a:r>
+                  <a:rPr lang="en-US" altLang="ko-KR" sz="1600" spc="-50" dirty="0"/>
+                  <a:t>5</a:t>
+                </a:r>
+                <a:r>
+                  <a:rPr lang="ko-KR" altLang="en-US" sz="1600" spc="-50" dirty="0"/>
+                  <a:t>천 달러가 </a:t>
+                </a:r>
+                <a:r>
+                  <a:rPr lang="ko-KR" altLang="en-US" sz="1600" spc="-50" dirty="0" err="1"/>
+                  <a:t>균등분배대등소득이</a:t>
+                </a:r>
+                <a:r>
+                  <a:rPr lang="ko-KR" altLang="en-US" sz="1600" spc="-50" dirty="0"/>
+                  <a:t> 된다</a:t>
+                </a:r>
+                <a:r>
+                  <a:rPr lang="en-US" altLang="ko-KR" sz="1600" spc="-50" dirty="0"/>
+                  <a:t>.</a:t>
+                </a:r>
+              </a:p>
+              <a:p>
+                <a:pPr marL="1292225" lvl="2" indent="-285750">
+                  <a:lnSpc>
+                    <a:spcPct val="150000"/>
+                  </a:lnSpc>
+                  <a:buFont typeface="Wingdings" panose="05000000000000000000" pitchFamily="2" charset="2"/>
+                  <a:buChar char="Ø"/>
+                </a:pPr>
+                <a:r>
+                  <a:rPr lang="ko-KR" altLang="en-US" sz="1600" spc="-50" dirty="0" err="1"/>
+                  <a:t>균등분배대등소득은</a:t>
+                </a:r>
+                <a:r>
+                  <a:rPr lang="ko-KR" altLang="en-US" sz="1600" spc="-50" dirty="0"/>
+                  <a:t> </a:t>
+                </a:r>
+                <a:r>
+                  <a:rPr lang="en-US" altLang="ko-KR" sz="1600" spc="-50" dirty="0"/>
+                  <a:t>1</a:t>
+                </a:r>
+                <a:r>
+                  <a:rPr lang="ko-KR" altLang="en-US" sz="1600" spc="-50" dirty="0"/>
+                  <a:t>인당 평균소득보다 더 작은 값을 갖는데</a:t>
+                </a:r>
+                <a:r>
+                  <a:rPr lang="en-US" altLang="ko-KR" sz="1600" spc="-50" dirty="0"/>
+                  <a:t>, </a:t>
+                </a:r>
+                <a:r>
+                  <a:rPr lang="ko-KR" altLang="en-US" sz="1600" spc="-50" dirty="0"/>
+                  <a:t>이는 불균등한 분배가 사회후생을 떨어뜨리기 때문이다</a:t>
+                </a:r>
+                <a:r>
+                  <a:rPr lang="en-US" altLang="ko-KR" sz="1600" spc="-50" dirty="0"/>
+                  <a:t>.</a:t>
+                </a:r>
+              </a:p>
+            </p:txBody>
+          </p:sp>
+        </mc:Choice>
+        <mc:Fallback xmlns="">
+          <p:sp>
+            <p:nvSpPr>
+              <p:cNvPr id="5" name="TextBox 4">
+                <a:extLst>
+                  <a:ext uri="{FF2B5EF4-FFF2-40B4-BE49-F238E27FC236}">
+                    <a16:creationId xmlns:a16="http://schemas.microsoft.com/office/drawing/2014/main" id="{252E5C67-F822-E779-DA23-CD2BD99926D1}"/>
+                  </a:ext>
+                </a:extLst>
+              </p:cNvPr>
+              <p:cNvSpPr txBox="1">
+                <a:spLocks noRot="1" noChangeAspect="1" noMove="1" noResize="1" noEditPoints="1" noAdjustHandles="1" noChangeArrowheads="1" noChangeShapeType="1" noTextEdit="1"/>
+              </p:cNvSpPr>
+              <p:nvPr/>
+            </p:nvSpPr>
+            <p:spPr>
+              <a:xfrm>
+                <a:off x="288790" y="958844"/>
+                <a:ext cx="11250267" cy="4547848"/>
+              </a:xfrm>
+              <a:prstGeom prst="rect">
+                <a:avLst/>
+              </a:prstGeom>
+              <a:blipFill>
+                <a:blip r:embed="rId2"/>
+                <a:stretch>
+                  <a:fillRect b="-804"/>
+                </a:stretch>
+              </a:blipFill>
+            </p:spPr>
+            <p:txBody>
+              <a:bodyPr/>
+              <a:lstStyle/>
+              <a:p>
+                <a:r>
+                  <a:rPr lang="ko-KR" altLang="en-US">
+                    <a:noFill/>
+                  </a:rPr>
+                  <a:t> </a:t>
+                </a:r>
+              </a:p>
+            </p:txBody>
+          </p:sp>
+        </mc:Fallback>
+      </mc:AlternateContent>
     </p:spTree>
     <p:extLst>
       <p:ext uri="{BB962C8B-B14F-4D97-AF65-F5344CB8AC3E}">
-        <p14:creationId xmlns:p14="http://schemas.microsoft.com/office/powerpoint/2010/main" val="1262055516"/>
+        <p14:creationId xmlns:p14="http://schemas.microsoft.com/office/powerpoint/2010/main" val="1590969044"/>
       </p:ext>
     </p:extLst>
   </p:cSld>
@@ -12757,8 +13278,12 @@
           <a:lstStyle/>
           <a:p>
             <a:r>
+              <a:rPr lang="ko-KR" altLang="en-US" dirty="0" err="1"/>
+              <a:t>앳킨슨</a:t>
+            </a:r>
+            <a:r>
               <a:rPr lang="ko-KR" altLang="en-US" dirty="0"/>
-              <a:t>개인적요인</a:t>
+              <a:t> 지수</a:t>
             </a:r>
           </a:p>
         </p:txBody>
@@ -12792,410 +13317,1103 @@
           </a:p>
         </p:txBody>
       </p:sp>
-      <p:sp>
-        <p:nvSpPr>
-          <p:cNvPr id="5" name="TextBox 4">
-            <a:extLst>
-              <a:ext uri="{FF2B5EF4-FFF2-40B4-BE49-F238E27FC236}">
-                <a16:creationId xmlns:a16="http://schemas.microsoft.com/office/drawing/2014/main" id="{E535292A-862D-590E-A579-61ED220DBBD8}"/>
-              </a:ext>
-            </a:extLst>
-          </p:cNvPr>
-          <p:cNvSpPr txBox="1"/>
-          <p:nvPr/>
-        </p:nvSpPr>
-        <p:spPr>
-          <a:xfrm>
-            <a:off x="288790" y="958844"/>
-            <a:ext cx="11250267" cy="2676182"/>
-          </a:xfrm>
-          <a:prstGeom prst="rect">
-            <a:avLst/>
-          </a:prstGeom>
-          <a:noFill/>
-        </p:spPr>
-        <p:txBody>
-          <a:bodyPr wrap="square" rtlCol="0" anchor="t">
-            <a:spAutoFit/>
-          </a:bodyPr>
-          <a:lstStyle/>
-          <a:p>
-            <a:pPr marL="377825" indent="-285750">
-              <a:lnSpc>
-                <a:spcPct val="150000"/>
-              </a:lnSpc>
-              <a:buFont typeface="Arial" panose="020B0604020202020204" pitchFamily="34" charset="0"/>
-              <a:buChar char="•"/>
-            </a:pPr>
-            <a:r>
-              <a:rPr lang="ko-KR" altLang="en-US" sz="1600" spc="-50" dirty="0"/>
-              <a:t>소득분배 혹은 경제적지위의 불평등을 발생시키는 원인은 크게 개인적 요인과 사회적 요인</a:t>
-            </a:r>
-            <a:r>
-              <a:rPr lang="en-US" altLang="ko-KR" sz="1600" spc="-50" dirty="0"/>
-              <a:t>, </a:t>
-            </a:r>
-            <a:r>
-              <a:rPr lang="ko-KR" altLang="en-US" sz="1600" spc="-50" dirty="0"/>
-              <a:t>두 범주로 나누어 볼 수 있다</a:t>
-            </a:r>
-            <a:r>
-              <a:rPr lang="en-US" altLang="ko-KR" sz="1600" spc="-50" dirty="0"/>
-              <a:t>.</a:t>
-            </a:r>
-          </a:p>
-          <a:p>
-            <a:pPr>
-              <a:lnSpc>
-                <a:spcPct val="150000"/>
-              </a:lnSpc>
-            </a:pPr>
-            <a:r>
-              <a:rPr lang="ko-KR" altLang="en-US" u="sng" dirty="0">
-                <a:ln w="3175">
-                  <a:noFill/>
-                </a:ln>
-                <a:latin typeface="HY헤드라인M" panose="02030600000101010101" pitchFamily="18" charset="-127"/>
-                <a:ea typeface="HY헤드라인M" panose="02030600000101010101" pitchFamily="18" charset="-127"/>
-              </a:rPr>
-              <a:t>개인적 요인</a:t>
-            </a:r>
-            <a:endParaRPr lang="en-US" altLang="ko-KR" sz="400" u="sng" dirty="0">
-              <a:ln w="3175">
-                <a:noFill/>
-              </a:ln>
-              <a:latin typeface="HY헤드라인M" panose="02030600000101010101" pitchFamily="18" charset="-127"/>
-              <a:ea typeface="HY헤드라인M" panose="02030600000101010101" pitchFamily="18" charset="-127"/>
-            </a:endParaRPr>
-          </a:p>
-          <a:p>
-            <a:pPr marL="434975" indent="-342900">
-              <a:lnSpc>
-                <a:spcPct val="150000"/>
-              </a:lnSpc>
-              <a:buFont typeface="+mj-lt"/>
-              <a:buAutoNum type="arabicPeriod"/>
-            </a:pPr>
-            <a:r>
-              <a:rPr lang="ko-KR" altLang="en-US" sz="1600" b="1" spc="-50" dirty="0"/>
-              <a:t>원초적 단계</a:t>
-            </a:r>
-            <a:r>
-              <a:rPr lang="en-US" altLang="ko-KR" sz="1600" spc="-50" dirty="0"/>
-              <a:t>: </a:t>
-            </a:r>
-            <a:r>
-              <a:rPr lang="ko-KR" altLang="en-US" sz="1600" spc="-50" dirty="0"/>
-              <a:t>인생의 가장 원초적인 단계에서 발생하는 불평등의 원인들은 다음과 같이 세 가지로 정리해 볼 수 있다</a:t>
-            </a:r>
-            <a:r>
-              <a:rPr lang="en-US" altLang="ko-KR" sz="1600" spc="-50" dirty="0"/>
-              <a:t>.</a:t>
-            </a:r>
-          </a:p>
-          <a:p>
-            <a:pPr marL="835200" lvl="1" indent="-284400">
-              <a:lnSpc>
-                <a:spcPct val="150000"/>
-              </a:lnSpc>
-              <a:buFont typeface="Wingdings" panose="05000000000000000000" pitchFamily="2" charset="2"/>
-              <a:buChar char="ü"/>
-            </a:pPr>
-            <a:r>
-              <a:rPr lang="ko-KR" altLang="en-US" sz="1600" b="1" spc="-50" dirty="0"/>
-              <a:t>유전적 요인</a:t>
-            </a:r>
-            <a:r>
-              <a:rPr lang="en-US" altLang="ko-KR" sz="1600" spc="-50" dirty="0"/>
-              <a:t>: </a:t>
-            </a:r>
-            <a:r>
-              <a:rPr lang="ko-KR" altLang="en-US" sz="1600" spc="-50" dirty="0"/>
-              <a:t>태어날 때부터 갖고 있는 유전자가 경제적 지위에 영향을 주는 것을 말한다</a:t>
-            </a:r>
-            <a:r>
-              <a:rPr lang="en-US" altLang="ko-KR" sz="1600" spc="-50" dirty="0"/>
-              <a:t>.</a:t>
-            </a:r>
-          </a:p>
-          <a:p>
-            <a:pPr marL="835200" lvl="1" indent="-284400">
-              <a:lnSpc>
-                <a:spcPct val="150000"/>
-              </a:lnSpc>
-              <a:buFont typeface="Wingdings" panose="05000000000000000000" pitchFamily="2" charset="2"/>
-              <a:buChar char="ü"/>
-            </a:pPr>
-            <a:r>
-              <a:rPr lang="ko-KR" altLang="en-US" sz="1600" b="1" spc="-50" dirty="0"/>
-              <a:t>교육적 환경</a:t>
-            </a:r>
-            <a:r>
-              <a:rPr lang="en-US" altLang="ko-KR" sz="1600" spc="-50" dirty="0"/>
-              <a:t>: </a:t>
-            </a:r>
-            <a:r>
-              <a:rPr lang="ko-KR" altLang="en-US" sz="1600" spc="-50" dirty="0"/>
-              <a:t>후천적 성장과정이 그의 경제적 지위에 영향을 주는 것을 말한다</a:t>
-            </a:r>
-            <a:r>
-              <a:rPr lang="en-US" altLang="ko-KR" sz="1600" spc="-50" dirty="0"/>
-              <a:t>.</a:t>
-            </a:r>
-          </a:p>
-          <a:p>
-            <a:pPr marL="835200" lvl="1" indent="-284400">
-              <a:lnSpc>
-                <a:spcPct val="150000"/>
-              </a:lnSpc>
-              <a:buFont typeface="Wingdings" panose="05000000000000000000" pitchFamily="2" charset="2"/>
-              <a:buChar char="ü"/>
-            </a:pPr>
-            <a:r>
-              <a:rPr lang="ko-KR" altLang="en-US" sz="1600" b="1" spc="-50" dirty="0"/>
-              <a:t>경제적 환경</a:t>
-            </a:r>
-            <a:r>
-              <a:rPr lang="en-US" altLang="ko-KR" sz="1600" spc="-50" dirty="0"/>
-              <a:t>: </a:t>
-            </a:r>
-            <a:r>
-              <a:rPr lang="ko-KR" altLang="en-US" sz="1600" spc="-50" dirty="0"/>
-              <a:t>유복한 집안에서 태어난 사람은 교육 기회</a:t>
-            </a:r>
-            <a:r>
-              <a:rPr lang="en-US" altLang="ko-KR" sz="1600" spc="-50" dirty="0"/>
-              <a:t> </a:t>
-            </a:r>
-            <a:r>
-              <a:rPr lang="ko-KR" altLang="en-US" sz="1600" spc="-50" dirty="0"/>
-              <a:t>혹은 다른 측면에서 유리한 여건을 갖는 것을 말한다</a:t>
-            </a:r>
-            <a:r>
-              <a:rPr lang="en-US" altLang="ko-KR" sz="1600" spc="-50" dirty="0"/>
-              <a:t>.</a:t>
-            </a:r>
-          </a:p>
-          <a:p>
-            <a:pPr marL="835200" lvl="1" indent="-284400">
-              <a:lnSpc>
-                <a:spcPct val="150000"/>
-              </a:lnSpc>
-              <a:buFont typeface="Wingdings" panose="05000000000000000000" pitchFamily="2" charset="2"/>
-              <a:buChar char="ü"/>
-            </a:pPr>
-            <a:endParaRPr lang="en-US" altLang="ko-KR" sz="1600" spc="-50" dirty="0"/>
-          </a:p>
-        </p:txBody>
-      </p:sp>
-      <p:pic>
-        <p:nvPicPr>
-          <p:cNvPr id="3" name="그림 2">
-            <a:extLst>
-              <a:ext uri="{FF2B5EF4-FFF2-40B4-BE49-F238E27FC236}">
-                <a16:creationId xmlns:a16="http://schemas.microsoft.com/office/drawing/2014/main" id="{D8396D40-027D-3B4E-FB85-FB711D5392E4}"/>
-              </a:ext>
-            </a:extLst>
-          </p:cNvPr>
-          <p:cNvPicPr>
-            <a:picLocks noChangeAspect="1"/>
-          </p:cNvPicPr>
-          <p:nvPr/>
-        </p:nvPicPr>
-        <p:blipFill>
-          <a:blip r:embed="rId2" cstate="print">
-            <a:extLst>
-              <a:ext uri="{28A0092B-C50C-407E-A947-70E740481C1C}">
-                <a14:useLocalDpi xmlns:a14="http://schemas.microsoft.com/office/drawing/2010/main" val="0"/>
-              </a:ext>
-            </a:extLst>
-          </a:blip>
-          <a:srcRect l="20886" t="11647" r="21093" b="6029"/>
-          <a:stretch>
-            <a:fillRect/>
-          </a:stretch>
-        </p:blipFill>
-        <p:spPr>
-          <a:xfrm>
-            <a:off x="8320655" y="3202798"/>
-            <a:ext cx="3411348" cy="3409102"/>
-          </a:xfrm>
-          <a:prstGeom prst="rect">
-            <a:avLst/>
-          </a:prstGeom>
-        </p:spPr>
-      </p:pic>
-      <p:sp>
-        <p:nvSpPr>
-          <p:cNvPr id="6" name="TextBox 5">
-            <a:extLst>
-              <a:ext uri="{FF2B5EF4-FFF2-40B4-BE49-F238E27FC236}">
-                <a16:creationId xmlns:a16="http://schemas.microsoft.com/office/drawing/2014/main" id="{047F5C63-668E-2D40-F00F-90BE55E882F6}"/>
-              </a:ext>
-            </a:extLst>
-          </p:cNvPr>
-          <p:cNvSpPr txBox="1"/>
-          <p:nvPr/>
-        </p:nvSpPr>
-        <p:spPr>
-          <a:xfrm>
-            <a:off x="7805605" y="3254500"/>
-            <a:ext cx="1491495" cy="276999"/>
-          </a:xfrm>
-          <a:prstGeom prst="rect">
-            <a:avLst/>
-          </a:prstGeom>
-          <a:noFill/>
-        </p:spPr>
-        <p:txBody>
-          <a:bodyPr wrap="square">
-            <a:spAutoFit/>
-          </a:bodyPr>
-          <a:lstStyle/>
-          <a:p>
-            <a:pPr algn="ctr"/>
-            <a:r>
-              <a:rPr lang="en-US" altLang="ko-KR" sz="1200" spc="-50" dirty="0"/>
-              <a:t>&lt;</a:t>
-            </a:r>
-            <a:r>
-              <a:rPr lang="ko-KR" altLang="en-US" sz="1200" spc="-50" dirty="0"/>
-              <a:t>불평등 발생경로</a:t>
-            </a:r>
-            <a:r>
-              <a:rPr lang="en-US" altLang="ko-KR" sz="1200" spc="-50" dirty="0"/>
-              <a:t>&gt;</a:t>
-            </a:r>
-            <a:endParaRPr lang="ko-KR" altLang="en-US" sz="1200" dirty="0"/>
-          </a:p>
-        </p:txBody>
-      </p:sp>
-      <p:sp>
-        <p:nvSpPr>
-          <p:cNvPr id="7" name="TextBox 6">
-            <a:extLst>
-              <a:ext uri="{FF2B5EF4-FFF2-40B4-BE49-F238E27FC236}">
-                <a16:creationId xmlns:a16="http://schemas.microsoft.com/office/drawing/2014/main" id="{0E001C50-0C9B-D5B8-DBC4-304CD5EE77AC}"/>
-              </a:ext>
-            </a:extLst>
-          </p:cNvPr>
-          <p:cNvSpPr txBox="1"/>
-          <p:nvPr/>
-        </p:nvSpPr>
-        <p:spPr>
-          <a:xfrm>
-            <a:off x="288789" y="3274228"/>
-            <a:ext cx="7516816" cy="2630015"/>
-          </a:xfrm>
-          <a:prstGeom prst="rect">
-            <a:avLst/>
-          </a:prstGeom>
-          <a:noFill/>
-        </p:spPr>
-        <p:txBody>
-          <a:bodyPr wrap="square" rtlCol="0" anchor="t">
-            <a:spAutoFit/>
-          </a:bodyPr>
-          <a:lstStyle/>
-          <a:p>
-            <a:pPr marL="377825" indent="-285750">
-              <a:lnSpc>
-                <a:spcPct val="150000"/>
-              </a:lnSpc>
-              <a:buFont typeface="Arial" panose="020B0604020202020204" pitchFamily="34" charset="0"/>
-              <a:buChar char="•"/>
-            </a:pPr>
-            <a:r>
-              <a:rPr lang="ko-KR" altLang="en-US" sz="1600" spc="-50" dirty="0"/>
-              <a:t>그림에서 가장 안쪽에 있는 것이 개인적 차원에서 발생하는 불평등 요인이다</a:t>
-            </a:r>
-            <a:r>
-              <a:rPr lang="en-US" altLang="ko-KR" sz="1600" spc="-50" dirty="0"/>
-              <a:t>.</a:t>
-            </a:r>
-          </a:p>
-          <a:p>
-            <a:pPr marL="835025" lvl="1" indent="-285750">
-              <a:lnSpc>
-                <a:spcPct val="150000"/>
-              </a:lnSpc>
-              <a:buFont typeface="Wingdings" panose="05000000000000000000" pitchFamily="2" charset="2"/>
-              <a:buChar char="ü"/>
-            </a:pPr>
-            <a:r>
-              <a:rPr lang="ko-KR" altLang="en-US" sz="1600" spc="-50" dirty="0"/>
-              <a:t>원초적 요인들이 싹터 불평등이 중간단계의 차이로 이어지고</a:t>
-            </a:r>
-            <a:r>
-              <a:rPr lang="en-US" altLang="ko-KR" sz="1600" spc="-50" dirty="0"/>
-              <a:t>, </a:t>
-            </a:r>
-            <a:r>
-              <a:rPr lang="ko-KR" altLang="en-US" sz="1600" spc="-50" dirty="0"/>
-              <a:t>결국은 맨 윗줄에 있는 경제적 지위의 결정요인으로 귀착되는 것을 보여주고 있다</a:t>
-            </a:r>
-            <a:r>
-              <a:rPr lang="en-US" altLang="ko-KR" sz="1600" spc="-50" dirty="0"/>
-              <a:t>.</a:t>
-            </a:r>
-          </a:p>
-          <a:p>
-            <a:pPr marL="377825" indent="-285750">
-              <a:lnSpc>
-                <a:spcPct val="150000"/>
-              </a:lnSpc>
-              <a:buFont typeface="Arial" panose="020B0604020202020204" pitchFamily="34" charset="0"/>
-              <a:buChar char="•"/>
-            </a:pPr>
-            <a:r>
-              <a:rPr lang="ko-KR" altLang="en-US" sz="1600" spc="-50" dirty="0"/>
-              <a:t>결국 개인적인 차원에서의 불평등의 싹은 가정에서 출발한다</a:t>
-            </a:r>
-            <a:r>
-              <a:rPr lang="en-US" altLang="ko-KR" sz="1600" spc="-50" dirty="0"/>
-              <a:t>.</a:t>
-            </a:r>
-          </a:p>
-          <a:p>
-            <a:pPr marL="835025" lvl="1" indent="-285750">
-              <a:lnSpc>
-                <a:spcPct val="150000"/>
-              </a:lnSpc>
-              <a:buFont typeface="Wingdings" panose="05000000000000000000" pitchFamily="2" charset="2"/>
-              <a:buChar char="ü"/>
-            </a:pPr>
-            <a:r>
-              <a:rPr lang="ko-KR" altLang="en-US" sz="1600" spc="-50" dirty="0"/>
-              <a:t>어떤 사람이 어느 가정에서 어떤 소질을 가지고 태어났느냐가 그 사람의 경제적인 장래를 좌우한다는 말이다</a:t>
-            </a:r>
-            <a:r>
-              <a:rPr lang="en-US" altLang="ko-KR" sz="1600" spc="-50" dirty="0"/>
-              <a:t>.</a:t>
-            </a:r>
-          </a:p>
-          <a:p>
-            <a:pPr marL="835025" lvl="1" indent="-285750">
-              <a:lnSpc>
-                <a:spcPct val="150000"/>
-              </a:lnSpc>
-              <a:buFont typeface="Wingdings" panose="05000000000000000000" pitchFamily="2" charset="2"/>
-              <a:buChar char="ü"/>
-            </a:pPr>
-            <a:r>
-              <a:rPr lang="ko-KR" altLang="en-US" sz="1600" spc="-50" dirty="0"/>
-              <a:t>가정이 개인적 차원에서 발생하는 불평등에 얼마나 중요한지 알 수 있다</a:t>
-            </a:r>
-            <a:r>
-              <a:rPr lang="en-US" altLang="ko-KR" sz="1600" spc="-50" dirty="0"/>
-              <a:t>.</a:t>
-            </a:r>
-          </a:p>
-        </p:txBody>
-      </p:sp>
+      <mc:AlternateContent xmlns:mc="http://schemas.openxmlformats.org/markup-compatibility/2006">
+        <mc:Choice xmlns:a14="http://schemas.microsoft.com/office/drawing/2010/main" Requires="a14">
+          <p:sp>
+            <p:nvSpPr>
+              <p:cNvPr id="5" name="TextBox 4">
+                <a:extLst>
+                  <a:ext uri="{FF2B5EF4-FFF2-40B4-BE49-F238E27FC236}">
+                    <a16:creationId xmlns:a16="http://schemas.microsoft.com/office/drawing/2014/main" id="{E535292A-862D-590E-A579-61ED220DBBD8}"/>
+                  </a:ext>
+                </a:extLst>
+              </p:cNvPr>
+              <p:cNvSpPr txBox="1"/>
+              <p:nvPr/>
+            </p:nvSpPr>
+            <p:spPr>
+              <a:xfrm>
+                <a:off x="288790" y="958844"/>
+                <a:ext cx="11250267" cy="5626540"/>
+              </a:xfrm>
+              <a:prstGeom prst="rect">
+                <a:avLst/>
+              </a:prstGeom>
+              <a:noFill/>
+            </p:spPr>
+            <p:txBody>
+              <a:bodyPr wrap="square" rtlCol="0" anchor="t">
+                <a:spAutoFit/>
+              </a:bodyPr>
+              <a:lstStyle/>
+              <a:p>
+                <a:pPr marL="377825" indent="-285750">
+                  <a:lnSpc>
+                    <a:spcPct val="150000"/>
+                  </a:lnSpc>
+                  <a:buFont typeface="Arial" panose="020B0604020202020204" pitchFamily="34" charset="0"/>
+                  <a:buChar char="•"/>
+                </a:pPr>
+                <a:r>
+                  <a:rPr lang="ko-KR" altLang="en-US" sz="1600" spc="-50" dirty="0"/>
+                  <a:t>앳킨슨은 이 균등분배소득에 기초해 다음과 같이 불평등도를 평가할 수 있는 </a:t>
+                </a:r>
+                <a:r>
+                  <a:rPr lang="ko-KR" altLang="en-US" sz="1600" spc="-50" dirty="0" err="1"/>
+                  <a:t>앳킨슨</a:t>
+                </a:r>
+                <a:r>
+                  <a:rPr lang="ko-KR" altLang="en-US" sz="1600" spc="-50" dirty="0"/>
+                  <a:t> 지수</a:t>
+                </a:r>
+                <a:r>
+                  <a:rPr lang="en-US" altLang="ko-KR" sz="1600" spc="-50" dirty="0"/>
+                  <a:t>(</a:t>
+                </a:r>
+                <a14:m>
+                  <m:oMath xmlns:m="http://schemas.openxmlformats.org/officeDocument/2006/math">
+                    <m:r>
+                      <a:rPr lang="en-US" altLang="ko-KR" sz="1600" b="0" i="1" spc="-50" smtClean="0">
+                        <a:latin typeface="Cambria Math" panose="02040503050406030204" pitchFamily="18" charset="0"/>
+                      </a:rPr>
+                      <m:t>𝐴</m:t>
+                    </m:r>
+                  </m:oMath>
+                </a14:m>
+                <a:r>
+                  <a:rPr lang="en-US" altLang="ko-KR" sz="1600" spc="-50" dirty="0"/>
+                  <a:t>)</a:t>
+                </a:r>
+                <a:r>
+                  <a:rPr lang="ko-KR" altLang="en-US" sz="1600" spc="-50" dirty="0"/>
+                  <a:t>를 산출할 수 있다고 말한다</a:t>
+                </a:r>
+                <a:r>
+                  <a:rPr lang="en-US" altLang="ko-KR" sz="1600" spc="-50" dirty="0"/>
+                  <a:t>.</a:t>
+                </a:r>
+              </a:p>
+              <a:p>
+                <a:pPr marL="377825" indent="-285750">
+                  <a:lnSpc>
+                    <a:spcPct val="150000"/>
+                  </a:lnSpc>
+                  <a:buFont typeface="Arial" panose="020B0604020202020204" pitchFamily="34" charset="0"/>
+                  <a:buChar char="•"/>
+                </a:pPr>
+                <a:endParaRPr lang="en-US" altLang="ko-KR" sz="1600" spc="-50" dirty="0"/>
+              </a:p>
+              <a:p>
+                <a:pPr marL="377825" indent="-285750">
+                  <a:lnSpc>
+                    <a:spcPct val="150000"/>
+                  </a:lnSpc>
+                  <a:buFont typeface="Arial" panose="020B0604020202020204" pitchFamily="34" charset="0"/>
+                  <a:buChar char="•"/>
+                </a:pPr>
+                <a:endParaRPr lang="en-US" altLang="ko-KR" sz="1600" spc="-50" dirty="0"/>
+              </a:p>
+              <a:p>
+                <a:pPr marL="835025" lvl="1" indent="-285750">
+                  <a:lnSpc>
+                    <a:spcPct val="150000"/>
+                  </a:lnSpc>
+                  <a:buFont typeface="Wingdings" panose="05000000000000000000" pitchFamily="2" charset="2"/>
+                  <a:buChar char="ü"/>
+                </a:pPr>
+                <a:r>
+                  <a:rPr lang="ko-KR" altLang="en-US" sz="1600" spc="-50" dirty="0"/>
+                  <a:t>만약 소득분배가 완전히 균등하면 </a:t>
+                </a:r>
+                <a14:m>
+                  <m:oMath xmlns:m="http://schemas.openxmlformats.org/officeDocument/2006/math">
+                    <m:sSub>
+                      <m:sSubPr>
+                        <m:ctrlPr>
+                          <a:rPr lang="en-US" altLang="ko-KR" sz="1600" i="1" spc="-50">
+                            <a:latin typeface="Cambria Math" panose="02040503050406030204" pitchFamily="18" charset="0"/>
+                          </a:rPr>
+                        </m:ctrlPr>
+                      </m:sSubPr>
+                      <m:e>
+                        <m:r>
+                          <a:rPr lang="en-US" altLang="ko-KR" sz="1600" i="1" spc="-50">
+                            <a:latin typeface="Cambria Math" panose="02040503050406030204" pitchFamily="18" charset="0"/>
+                          </a:rPr>
+                          <m:t>𝑌</m:t>
+                        </m:r>
+                      </m:e>
+                      <m:sub>
+                        <m:r>
+                          <a:rPr lang="en-US" altLang="ko-KR" sz="1600" i="1" spc="-50">
+                            <a:latin typeface="Cambria Math" panose="02040503050406030204" pitchFamily="18" charset="0"/>
+                          </a:rPr>
+                          <m:t>𝑒</m:t>
+                        </m:r>
+                      </m:sub>
+                    </m:sSub>
+                    <m:r>
+                      <a:rPr lang="en-US" altLang="ko-KR" sz="1600" b="0" i="1" spc="-50" smtClean="0">
+                        <a:latin typeface="Cambria Math" panose="02040503050406030204" pitchFamily="18" charset="0"/>
+                      </a:rPr>
+                      <m:t>=</m:t>
+                    </m:r>
+                    <m:bar>
+                      <m:barPr>
+                        <m:pos m:val="top"/>
+                        <m:ctrlPr>
+                          <a:rPr lang="en-US" altLang="ko-KR" sz="1600" i="1" spc="-50">
+                            <a:latin typeface="Cambria Math" panose="02040503050406030204" pitchFamily="18" charset="0"/>
+                          </a:rPr>
+                        </m:ctrlPr>
+                      </m:barPr>
+                      <m:e>
+                        <m:r>
+                          <a:rPr lang="en-US" altLang="ko-KR" sz="1600" i="1" spc="-50">
+                            <a:latin typeface="Cambria Math" panose="02040503050406030204" pitchFamily="18" charset="0"/>
+                          </a:rPr>
+                          <m:t>𝑌</m:t>
+                        </m:r>
+                      </m:e>
+                    </m:bar>
+                  </m:oMath>
+                </a14:m>
+                <a:r>
+                  <a:rPr lang="en-US" altLang="ko-KR" sz="1600" spc="-50" dirty="0"/>
+                  <a:t> </a:t>
+                </a:r>
+                <a:r>
+                  <a:rPr lang="ko-KR" altLang="en-US" sz="1600" spc="-50" dirty="0"/>
+                  <a:t>가 성립할 것이고</a:t>
+                </a:r>
+                <a:r>
+                  <a:rPr lang="en-US" altLang="ko-KR" sz="1600" spc="-50" dirty="0"/>
+                  <a:t>, </a:t>
+                </a:r>
+                <a:r>
+                  <a:rPr lang="ko-KR" altLang="en-US" sz="1600" spc="-50" dirty="0"/>
+                  <a:t>따라서 </a:t>
+                </a:r>
+                <a:r>
+                  <a:rPr lang="ko-KR" altLang="en-US" sz="1600" spc="-50" dirty="0" err="1"/>
+                  <a:t>앳킨슨지수는</a:t>
+                </a:r>
+                <a:r>
+                  <a:rPr lang="ko-KR" altLang="en-US" sz="1600" spc="-50" dirty="0"/>
+                  <a:t> </a:t>
+                </a:r>
+                <a:r>
+                  <a:rPr lang="en-US" altLang="ko-KR" sz="1600" spc="-50" dirty="0"/>
+                  <a:t>0</a:t>
+                </a:r>
+                <a:r>
+                  <a:rPr lang="ko-KR" altLang="en-US" sz="1600" spc="-50" dirty="0"/>
+                  <a:t>의 값을 갖는다</a:t>
+                </a:r>
+                <a:endParaRPr lang="en-US" altLang="ko-KR" sz="1600" spc="-50" dirty="0"/>
+              </a:p>
+              <a:p>
+                <a:pPr marL="835025" lvl="1" indent="-285750">
+                  <a:lnSpc>
+                    <a:spcPct val="150000"/>
+                  </a:lnSpc>
+                  <a:buFont typeface="Wingdings" panose="05000000000000000000" pitchFamily="2" charset="2"/>
+                  <a:buChar char="ü"/>
+                </a:pPr>
+                <a:r>
+                  <a:rPr lang="ko-KR" altLang="en-US" sz="1600" spc="-50" dirty="0"/>
+                  <a:t>그 반대의 극단이어서 거의 </a:t>
+                </a:r>
+                <a:r>
+                  <a:rPr lang="en-US" altLang="ko-KR" sz="1600" spc="-50" dirty="0"/>
+                  <a:t>0</a:t>
+                </a:r>
+                <a:r>
+                  <a:rPr lang="ko-KR" altLang="en-US" sz="1600" spc="-50" dirty="0"/>
+                  <a:t>원에 가까운 </a:t>
+                </a:r>
+                <a:r>
+                  <a:rPr lang="en-US" altLang="ko-KR" sz="1600" spc="-50" dirty="0"/>
+                  <a:t>1</a:t>
+                </a:r>
+                <a:r>
+                  <a:rPr lang="ko-KR" altLang="en-US" sz="1600" spc="-50" dirty="0"/>
+                  <a:t>인당 소득이라도 균등하게 분배되기만 하면</a:t>
+                </a:r>
+                <a:r>
+                  <a:rPr lang="en-US" altLang="ko-KR" sz="1600" spc="-50" dirty="0"/>
+                  <a:t>, </a:t>
+                </a:r>
+                <a:r>
+                  <a:rPr lang="ko-KR" altLang="en-US" sz="1600" spc="-50" dirty="0"/>
+                  <a:t>지금의 사회후생을 달성할 수 있을 때 </a:t>
+                </a:r>
+                <a:r>
+                  <a:rPr lang="ko-KR" altLang="en-US" sz="1600" spc="-50" dirty="0" err="1"/>
+                  <a:t>앳킨슨지수는</a:t>
+                </a:r>
+                <a:r>
+                  <a:rPr lang="ko-KR" altLang="en-US" sz="1600" spc="-50" dirty="0"/>
+                  <a:t> </a:t>
+                </a:r>
+                <a:r>
+                  <a:rPr lang="en-US" altLang="ko-KR" sz="1600" spc="-50" dirty="0"/>
+                  <a:t>1</a:t>
+                </a:r>
+                <a:r>
+                  <a:rPr lang="ko-KR" altLang="en-US" sz="1600" spc="-50" dirty="0"/>
+                  <a:t>에 가까운 값을 갖게 된다</a:t>
+                </a:r>
+                <a:r>
+                  <a:rPr lang="en-US" altLang="ko-KR" sz="1600" spc="-50" dirty="0"/>
+                  <a:t>. </a:t>
+                </a:r>
+              </a:p>
+              <a:p>
+                <a:pPr marL="377825" indent="-285750">
+                  <a:lnSpc>
+                    <a:spcPct val="150000"/>
+                  </a:lnSpc>
+                  <a:buFont typeface="Arial" panose="020B0604020202020204" pitchFamily="34" charset="0"/>
+                  <a:buChar char="•"/>
+                </a:pPr>
+                <a:r>
+                  <a:rPr lang="ko-KR" altLang="en-US" sz="1600" spc="-50" dirty="0" err="1"/>
+                  <a:t>앳킨슨지수는</a:t>
+                </a:r>
+                <a:r>
+                  <a:rPr lang="ko-KR" altLang="en-US" sz="1600" spc="-50" dirty="0"/>
+                  <a:t> 아래의 식을 통해 도출이 된다</a:t>
+                </a:r>
+                <a:r>
+                  <a:rPr lang="en-US" altLang="ko-KR" sz="1600" spc="-50" dirty="0"/>
+                  <a:t>.</a:t>
+                </a:r>
+              </a:p>
+              <a:p>
+                <a:pPr marL="377825" indent="-285750">
+                  <a:lnSpc>
+                    <a:spcPct val="150000"/>
+                  </a:lnSpc>
+                  <a:buFont typeface="Arial" panose="020B0604020202020204" pitchFamily="34" charset="0"/>
+                  <a:buChar char="•"/>
+                </a:pPr>
+                <a:endParaRPr lang="en-US" altLang="ko-KR" sz="1600" spc="-50" dirty="0"/>
+              </a:p>
+              <a:p>
+                <a:pPr marL="377825" indent="-285750">
+                  <a:lnSpc>
+                    <a:spcPct val="150000"/>
+                  </a:lnSpc>
+                  <a:buFont typeface="Arial" panose="020B0604020202020204" pitchFamily="34" charset="0"/>
+                  <a:buChar char="•"/>
+                </a:pPr>
+                <a:endParaRPr lang="en-US" altLang="ko-KR" sz="1600" spc="-50" dirty="0"/>
+              </a:p>
+              <a:p>
+                <a:pPr marL="92075">
+                  <a:lnSpc>
+                    <a:spcPct val="150000"/>
+                  </a:lnSpc>
+                </a:pPr>
+                <a:endParaRPr lang="en-US" altLang="ko-KR" sz="1600" spc="-50" dirty="0"/>
+              </a:p>
+              <a:p>
+                <a:pPr marL="835025" lvl="1" indent="-285750">
+                  <a:lnSpc>
+                    <a:spcPct val="150000"/>
+                  </a:lnSpc>
+                  <a:buFont typeface="Wingdings" panose="05000000000000000000" pitchFamily="2" charset="2"/>
+                  <a:buChar char="ü"/>
+                </a:pPr>
+                <a14:m>
+                  <m:oMath xmlns:m="http://schemas.openxmlformats.org/officeDocument/2006/math">
+                    <m:sSub>
+                      <m:sSubPr>
+                        <m:ctrlPr>
+                          <a:rPr lang="en-US" altLang="ko-KR" sz="1600" i="1" spc="-50">
+                            <a:latin typeface="Cambria Math" panose="02040503050406030204" pitchFamily="18" charset="0"/>
+                          </a:rPr>
+                        </m:ctrlPr>
+                      </m:sSubPr>
+                      <m:e>
+                        <m:r>
+                          <a:rPr lang="en-US" altLang="ko-KR" sz="1600" i="1" spc="-50">
+                            <a:latin typeface="Cambria Math" panose="02040503050406030204" pitchFamily="18" charset="0"/>
+                          </a:rPr>
+                          <m:t>𝑌</m:t>
+                        </m:r>
+                      </m:e>
+                      <m:sub>
+                        <m:r>
+                          <a:rPr lang="en-US" altLang="ko-KR" sz="1600" i="1" spc="-50">
+                            <a:latin typeface="Cambria Math" panose="02040503050406030204" pitchFamily="18" charset="0"/>
+                          </a:rPr>
+                          <m:t>𝑖</m:t>
+                        </m:r>
+                      </m:sub>
+                    </m:sSub>
+                  </m:oMath>
+                </a14:m>
+                <a:r>
+                  <a:rPr lang="ko-KR" altLang="en-US" sz="1600" spc="-50" dirty="0"/>
+                  <a:t>는 </a:t>
+                </a:r>
+                <a14:m>
+                  <m:oMath xmlns:m="http://schemas.openxmlformats.org/officeDocument/2006/math">
+                    <m:r>
+                      <a:rPr lang="en-US" altLang="ko-KR" sz="1600" b="0" i="1" spc="-50" smtClean="0">
+                        <a:latin typeface="Cambria Math" panose="02040503050406030204" pitchFamily="18" charset="0"/>
+                      </a:rPr>
+                      <m:t>𝑖</m:t>
+                    </m:r>
+                  </m:oMath>
+                </a14:m>
+                <a:r>
+                  <a:rPr lang="ko-KR" altLang="en-US" sz="1600" spc="-50" dirty="0"/>
+                  <a:t>번째 소득계층에 속하는 사람들의 소득</a:t>
+                </a:r>
+                <a:r>
+                  <a:rPr lang="en-US" altLang="ko-KR" sz="1600" spc="-50" dirty="0"/>
+                  <a:t>, </a:t>
+                </a:r>
+                <a14:m>
+                  <m:oMath xmlns:m="http://schemas.openxmlformats.org/officeDocument/2006/math">
+                    <m:sSub>
+                      <m:sSubPr>
+                        <m:ctrlPr>
+                          <a:rPr lang="en-US" altLang="ko-KR" sz="1600" i="1" spc="-50">
+                            <a:latin typeface="Cambria Math" panose="02040503050406030204" pitchFamily="18" charset="0"/>
+                          </a:rPr>
+                        </m:ctrlPr>
+                      </m:sSubPr>
+                      <m:e>
+                        <m:r>
+                          <a:rPr lang="en-US" altLang="ko-KR" sz="1600" i="1" spc="-50">
+                            <a:latin typeface="Cambria Math" panose="02040503050406030204" pitchFamily="18" charset="0"/>
+                          </a:rPr>
+                          <m:t>𝑓</m:t>
+                        </m:r>
+                      </m:e>
+                      <m:sub>
+                        <m:r>
+                          <a:rPr lang="en-US" altLang="ko-KR" sz="1600" i="1" spc="-50">
+                            <a:latin typeface="Cambria Math" panose="02040503050406030204" pitchFamily="18" charset="0"/>
+                          </a:rPr>
+                          <m:t>𝑖</m:t>
+                        </m:r>
+                      </m:sub>
+                    </m:sSub>
+                  </m:oMath>
+                </a14:m>
+                <a:r>
+                  <a:rPr lang="ko-KR" altLang="en-US" sz="1600" spc="-50" dirty="0"/>
+                  <a:t>는 이 소득계층에 속하는 사람들이 전체 인구에서 차지하는 비율</a:t>
+                </a:r>
+                <a:endParaRPr lang="en-US" altLang="ko-KR" sz="1600" spc="-50" dirty="0"/>
+              </a:p>
+              <a:p>
+                <a:pPr marL="835025" lvl="1" indent="-285750">
+                  <a:lnSpc>
+                    <a:spcPct val="150000"/>
+                  </a:lnSpc>
+                  <a:buFont typeface="Wingdings" panose="05000000000000000000" pitchFamily="2" charset="2"/>
+                  <a:buChar char="ü"/>
+                </a:pPr>
+                <a:r>
+                  <a:rPr lang="ko-KR" altLang="en-US" sz="1600" spc="-50" dirty="0"/>
+                  <a:t>이 식에서 </a:t>
+                </a:r>
+                <a:r>
+                  <a:rPr lang="ko-KR" altLang="en-US" sz="1600" spc="-50" dirty="0" err="1"/>
+                  <a:t>분배매개변수</a:t>
+                </a:r>
+                <a:r>
+                  <a:rPr lang="en-US" altLang="ko-KR" sz="1600" spc="-50" dirty="0"/>
+                  <a:t>(distributive parameter) </a:t>
+                </a:r>
+                <a14:m>
+                  <m:oMath xmlns:m="http://schemas.openxmlformats.org/officeDocument/2006/math">
+                    <m:r>
+                      <a:rPr lang="ko-KR" altLang="en-US" sz="1600" i="1" spc="-50" smtClean="0">
+                        <a:latin typeface="Cambria Math" panose="02040503050406030204" pitchFamily="18" charset="0"/>
+                      </a:rPr>
+                      <m:t>𝜀</m:t>
+                    </m:r>
+                  </m:oMath>
+                </a14:m>
+                <a:r>
+                  <a:rPr lang="ko-KR" altLang="en-US" sz="1600" spc="-50" dirty="0"/>
+                  <a:t>이 중요한 역할을 수행한다</a:t>
+                </a:r>
+                <a:r>
+                  <a:rPr lang="en-US" altLang="ko-KR" sz="1600" spc="-50" dirty="0"/>
+                  <a:t>.</a:t>
+                </a:r>
+              </a:p>
+              <a:p>
+                <a:pPr marL="1292225" lvl="2" indent="-285750">
+                  <a:lnSpc>
+                    <a:spcPct val="150000"/>
+                  </a:lnSpc>
+                  <a:buFont typeface="Wingdings" panose="05000000000000000000" pitchFamily="2" charset="2"/>
+                  <a:buChar char="Ø"/>
+                </a:pPr>
+                <a:r>
+                  <a:rPr lang="ko-KR" altLang="en-US" sz="1600" spc="-50" dirty="0"/>
+                  <a:t>같은 분배상태여도 </a:t>
+                </a:r>
+                <a14:m>
+                  <m:oMath xmlns:m="http://schemas.openxmlformats.org/officeDocument/2006/math">
+                    <m:r>
+                      <a:rPr lang="ko-KR" altLang="en-US" sz="1600" i="1" spc="-50">
+                        <a:latin typeface="Cambria Math" panose="02040503050406030204" pitchFamily="18" charset="0"/>
+                      </a:rPr>
+                      <m:t>𝜀</m:t>
+                    </m:r>
+                  </m:oMath>
+                </a14:m>
+                <a:r>
+                  <a:rPr lang="ko-KR" altLang="en-US" sz="1600" spc="-50" dirty="0"/>
+                  <a:t>값이 달라지면</a:t>
+                </a:r>
+                <a:r>
+                  <a:rPr lang="en-US" altLang="ko-KR" sz="1600" spc="-50" dirty="0"/>
+                  <a:t>, </a:t>
+                </a:r>
+                <a:r>
+                  <a:rPr lang="ko-KR" altLang="en-US" sz="1600" spc="-50" dirty="0" err="1"/>
+                  <a:t>앳킨슨지수가</a:t>
+                </a:r>
+                <a:r>
+                  <a:rPr lang="ko-KR" altLang="en-US" sz="1600" spc="-50" dirty="0"/>
+                  <a:t> 값이 다르기 때문이다</a:t>
+                </a:r>
+                <a:r>
+                  <a:rPr lang="en-US" altLang="ko-KR" sz="1600" spc="-50" dirty="0"/>
+                  <a:t>.</a:t>
+                </a:r>
+              </a:p>
+              <a:p>
+                <a:pPr marL="1292225" lvl="2" indent="-285750">
+                  <a:lnSpc>
+                    <a:spcPct val="150000"/>
+                  </a:lnSpc>
+                  <a:buFont typeface="Wingdings" panose="05000000000000000000" pitchFamily="2" charset="2"/>
+                  <a:buChar char="Ø"/>
+                </a:pPr>
+                <a14:m>
+                  <m:oMath xmlns:m="http://schemas.openxmlformats.org/officeDocument/2006/math">
+                    <m:r>
+                      <a:rPr lang="ko-KR" altLang="en-US" sz="1600" i="1" spc="-50">
+                        <a:latin typeface="Cambria Math" panose="02040503050406030204" pitchFamily="18" charset="0"/>
+                      </a:rPr>
+                      <m:t>𝜀</m:t>
+                    </m:r>
+                  </m:oMath>
+                </a14:m>
+                <a:r>
+                  <a:rPr lang="ko-KR" altLang="en-US" sz="1600" spc="-50" dirty="0"/>
+                  <a:t>는 </a:t>
+                </a:r>
+                <a:r>
+                  <a:rPr lang="en-US" altLang="ko-KR" sz="1600" spc="-50" dirty="0"/>
+                  <a:t>0</a:t>
+                </a:r>
+                <a:r>
+                  <a:rPr lang="ko-KR" altLang="en-US" sz="1600" spc="-50" dirty="0"/>
+                  <a:t>에부터 무한대까지 값을 가질 수 있으며</a:t>
+                </a:r>
+                <a:r>
+                  <a:rPr lang="en-US" altLang="ko-KR" sz="1600" spc="-50" dirty="0"/>
+                  <a:t>, </a:t>
+                </a:r>
+                <a14:m>
+                  <m:oMath xmlns:m="http://schemas.openxmlformats.org/officeDocument/2006/math">
+                    <m:r>
+                      <a:rPr lang="ko-KR" altLang="en-US" sz="1600" i="1" spc="-50">
+                        <a:latin typeface="Cambria Math" panose="02040503050406030204" pitchFamily="18" charset="0"/>
+                      </a:rPr>
+                      <m:t>𝜀</m:t>
+                    </m:r>
+                  </m:oMath>
+                </a14:m>
+                <a:r>
+                  <a:rPr lang="en-US" altLang="ko-KR" sz="1600" spc="-50" dirty="0"/>
+                  <a:t> </a:t>
+                </a:r>
+                <a:r>
+                  <a:rPr lang="ko-KR" altLang="en-US" sz="1600" spc="-50" dirty="0"/>
+                  <a:t>값이 커질수록 저소득층의 소득에 부여하는 가중치 값이 커진다</a:t>
+                </a:r>
+                <a:r>
+                  <a:rPr lang="en-US" altLang="ko-KR" sz="1600" spc="-50" dirty="0"/>
+                  <a:t>.</a:t>
+                </a:r>
+              </a:p>
+              <a:p>
+                <a:pPr marL="1292225" lvl="2" indent="-285750">
+                  <a:lnSpc>
+                    <a:spcPct val="150000"/>
+                  </a:lnSpc>
+                  <a:buFont typeface="Wingdings" panose="05000000000000000000" pitchFamily="2" charset="2"/>
+                  <a:buChar char="Ø"/>
+                </a:pPr>
+                <a:r>
+                  <a:rPr lang="ko-KR" altLang="en-US" sz="1600" spc="-50" dirty="0"/>
+                  <a:t>즉</a:t>
+                </a:r>
+                <a:r>
+                  <a:rPr lang="en-US" altLang="ko-KR" sz="1600" spc="-50" dirty="0"/>
+                  <a:t>, </a:t>
+                </a:r>
+                <a:r>
+                  <a:rPr lang="ko-KR" altLang="en-US" sz="1600" spc="-50" dirty="0"/>
+                  <a:t>평등을 선호하는 사람일수록</a:t>
+                </a:r>
+                <a:r>
+                  <a:rPr lang="en-US" altLang="ko-KR" sz="1600" spc="-50" dirty="0"/>
+                  <a:t>, </a:t>
+                </a:r>
+                <a:r>
+                  <a:rPr lang="ko-KR" altLang="en-US" sz="1600" spc="-50" dirty="0"/>
+                  <a:t>더 높은 </a:t>
+                </a:r>
+                <a14:m>
+                  <m:oMath xmlns:m="http://schemas.openxmlformats.org/officeDocument/2006/math">
+                    <m:r>
+                      <a:rPr lang="ko-KR" altLang="en-US" sz="1600" i="1" spc="-50">
+                        <a:latin typeface="Cambria Math" panose="02040503050406030204" pitchFamily="18" charset="0"/>
+                      </a:rPr>
+                      <m:t>𝜀</m:t>
+                    </m:r>
+                  </m:oMath>
+                </a14:m>
+                <a:r>
+                  <a:rPr lang="en-US" altLang="ko-KR" sz="1600" spc="-50" dirty="0"/>
+                  <a:t> </a:t>
+                </a:r>
+                <a:r>
+                  <a:rPr lang="ko-KR" altLang="en-US" sz="1600" spc="-50" dirty="0"/>
+                  <a:t>값을 마음에 두고 있게 된다</a:t>
+                </a:r>
+                <a:r>
+                  <a:rPr lang="en-US" altLang="ko-KR" sz="1600" spc="-50" dirty="0"/>
+                  <a:t>.</a:t>
+                </a:r>
+              </a:p>
+            </p:txBody>
+          </p:sp>
+        </mc:Choice>
+        <mc:Fallback>
+          <p:sp>
+            <p:nvSpPr>
+              <p:cNvPr id="5" name="TextBox 4">
+                <a:extLst>
+                  <a:ext uri="{FF2B5EF4-FFF2-40B4-BE49-F238E27FC236}">
+                    <a16:creationId xmlns:a16="http://schemas.microsoft.com/office/drawing/2014/main" id="{E535292A-862D-590E-A579-61ED220DBBD8}"/>
+                  </a:ext>
+                </a:extLst>
+              </p:cNvPr>
+              <p:cNvSpPr txBox="1">
+                <a:spLocks noRot="1" noChangeAspect="1" noMove="1" noResize="1" noEditPoints="1" noAdjustHandles="1" noChangeArrowheads="1" noChangeShapeType="1" noTextEdit="1"/>
+              </p:cNvSpPr>
+              <p:nvPr/>
+            </p:nvSpPr>
+            <p:spPr>
+              <a:xfrm>
+                <a:off x="288790" y="958844"/>
+                <a:ext cx="11250267" cy="5626540"/>
+              </a:xfrm>
+              <a:prstGeom prst="rect">
+                <a:avLst/>
+              </a:prstGeom>
+              <a:blipFill>
+                <a:blip r:embed="rId2"/>
+                <a:stretch>
+                  <a:fillRect r="-650" b="-433"/>
+                </a:stretch>
+              </a:blipFill>
+            </p:spPr>
+            <p:txBody>
+              <a:bodyPr/>
+              <a:lstStyle/>
+              <a:p>
+                <a:r>
+                  <a:rPr lang="ko-KR" altLang="en-US">
+                    <a:noFill/>
+                  </a:rPr>
+                  <a:t> </a:t>
+                </a:r>
+              </a:p>
+            </p:txBody>
+          </p:sp>
+        </mc:Fallback>
+      </mc:AlternateContent>
+      <mc:AlternateContent xmlns:mc="http://schemas.openxmlformats.org/markup-compatibility/2006" xmlns:a14="http://schemas.microsoft.com/office/drawing/2010/main">
+        <mc:Choice Requires="a14">
+          <p:sp>
+            <p:nvSpPr>
+              <p:cNvPr id="9" name="TextBox 8">
+                <a:extLst>
+                  <a:ext uri="{FF2B5EF4-FFF2-40B4-BE49-F238E27FC236}">
+                    <a16:creationId xmlns:a16="http://schemas.microsoft.com/office/drawing/2014/main" id="{D3A95C47-E49C-BA73-8925-8C53544D0DB0}"/>
+                  </a:ext>
+                </a:extLst>
+              </p:cNvPr>
+              <p:cNvSpPr txBox="1"/>
+              <p:nvPr/>
+            </p:nvSpPr>
+            <p:spPr>
+              <a:xfrm>
+                <a:off x="2207353" y="1449016"/>
+                <a:ext cx="1706110" cy="648254"/>
+              </a:xfrm>
+              <a:prstGeom prst="rect">
+                <a:avLst/>
+              </a:prstGeom>
+              <a:noFill/>
+            </p:spPr>
+            <p:txBody>
+              <a:bodyPr wrap="square">
+                <a:spAutoFit/>
+              </a:bodyPr>
+              <a:lstStyle/>
+              <a:p>
+                <a:pPr/>
+                <a14:m>
+                  <m:oMathPara xmlns:m="http://schemas.openxmlformats.org/officeDocument/2006/math">
+                    <m:oMathParaPr>
+                      <m:jc m:val="centerGroup"/>
+                    </m:oMathParaPr>
+                    <m:oMath xmlns:m="http://schemas.openxmlformats.org/officeDocument/2006/math">
+                      <m:r>
+                        <a:rPr lang="en-US" altLang="ko-KR" b="0" i="1" spc="-50" smtClean="0">
+                          <a:latin typeface="Cambria Math" panose="02040503050406030204" pitchFamily="18" charset="0"/>
+                        </a:rPr>
+                        <m:t>𝐴</m:t>
+                      </m:r>
+                      <m:r>
+                        <a:rPr lang="en-US" altLang="ko-KR" b="0" i="1" spc="-50" smtClean="0">
+                          <a:latin typeface="Cambria Math" panose="02040503050406030204" pitchFamily="18" charset="0"/>
+                        </a:rPr>
+                        <m:t>=1−</m:t>
+                      </m:r>
+                      <m:f>
+                        <m:fPr>
+                          <m:ctrlPr>
+                            <a:rPr lang="en-US" altLang="ko-KR" b="0" i="1" spc="-50" smtClean="0">
+                              <a:latin typeface="Cambria Math" panose="02040503050406030204" pitchFamily="18" charset="0"/>
+                            </a:rPr>
+                          </m:ctrlPr>
+                        </m:fPr>
+                        <m:num>
+                          <m:sSub>
+                            <m:sSubPr>
+                              <m:ctrlPr>
+                                <a:rPr lang="en-US" altLang="ko-KR" i="1" spc="-50">
+                                  <a:latin typeface="Cambria Math" panose="02040503050406030204" pitchFamily="18" charset="0"/>
+                                </a:rPr>
+                              </m:ctrlPr>
+                            </m:sSubPr>
+                            <m:e>
+                              <m:r>
+                                <a:rPr lang="en-US" altLang="ko-KR" i="1" spc="-50">
+                                  <a:latin typeface="Cambria Math" panose="02040503050406030204" pitchFamily="18" charset="0"/>
+                                </a:rPr>
+                                <m:t>𝑌</m:t>
+                              </m:r>
+                            </m:e>
+                            <m:sub>
+                              <m:r>
+                                <a:rPr lang="en-US" altLang="ko-KR" i="1" spc="-50">
+                                  <a:latin typeface="Cambria Math" panose="02040503050406030204" pitchFamily="18" charset="0"/>
+                                </a:rPr>
+                                <m:t>𝑒</m:t>
+                              </m:r>
+                            </m:sub>
+                          </m:sSub>
+                        </m:num>
+                        <m:den>
+                          <m:bar>
+                            <m:barPr>
+                              <m:pos m:val="top"/>
+                              <m:ctrlPr>
+                                <a:rPr lang="en-US" altLang="ko-KR" i="1" spc="-50">
+                                  <a:latin typeface="Cambria Math" panose="02040503050406030204" pitchFamily="18" charset="0"/>
+                                </a:rPr>
+                              </m:ctrlPr>
+                            </m:barPr>
+                            <m:e>
+                              <m:r>
+                                <a:rPr lang="en-US" altLang="ko-KR" i="1" spc="-50">
+                                  <a:latin typeface="Cambria Math" panose="02040503050406030204" pitchFamily="18" charset="0"/>
+                                </a:rPr>
+                                <m:t>𝑌</m:t>
+                              </m:r>
+                            </m:e>
+                          </m:bar>
+                        </m:den>
+                      </m:f>
+                    </m:oMath>
+                  </m:oMathPara>
+                </a14:m>
+                <a:endParaRPr lang="ko-KR" altLang="en-US" dirty="0"/>
+              </a:p>
+            </p:txBody>
+          </p:sp>
+        </mc:Choice>
+        <mc:Fallback xmlns="">
+          <p:sp>
+            <p:nvSpPr>
+              <p:cNvPr id="9" name="TextBox 8">
+                <a:extLst>
+                  <a:ext uri="{FF2B5EF4-FFF2-40B4-BE49-F238E27FC236}">
+                    <a16:creationId xmlns:a16="http://schemas.microsoft.com/office/drawing/2014/main" id="{D3A95C47-E49C-BA73-8925-8C53544D0DB0}"/>
+                  </a:ext>
+                </a:extLst>
+              </p:cNvPr>
+              <p:cNvSpPr txBox="1">
+                <a:spLocks noRot="1" noChangeAspect="1" noMove="1" noResize="1" noEditPoints="1" noAdjustHandles="1" noChangeArrowheads="1" noChangeShapeType="1" noTextEdit="1"/>
+              </p:cNvSpPr>
+              <p:nvPr/>
+            </p:nvSpPr>
+            <p:spPr>
+              <a:xfrm>
+                <a:off x="2207353" y="1449016"/>
+                <a:ext cx="1706110" cy="648254"/>
+              </a:xfrm>
+              <a:prstGeom prst="rect">
+                <a:avLst/>
+              </a:prstGeom>
+              <a:blipFill>
+                <a:blip r:embed="rId3"/>
+                <a:stretch>
+                  <a:fillRect/>
+                </a:stretch>
+              </a:blipFill>
+            </p:spPr>
+            <p:txBody>
+              <a:bodyPr/>
+              <a:lstStyle/>
+              <a:p>
+                <a:r>
+                  <a:rPr lang="ko-KR" altLang="en-US">
+                    <a:noFill/>
+                  </a:rPr>
+                  <a:t> </a:t>
+                </a:r>
+              </a:p>
+            </p:txBody>
+          </p:sp>
+        </mc:Fallback>
+      </mc:AlternateContent>
+      <mc:AlternateContent xmlns:mc="http://schemas.openxmlformats.org/markup-compatibility/2006">
+        <mc:Choice xmlns:a14="http://schemas.microsoft.com/office/drawing/2010/main" Requires="a14">
+          <p:sp>
+            <p:nvSpPr>
+              <p:cNvPr id="3" name="TextBox 2">
+                <a:extLst>
+                  <a:ext uri="{FF2B5EF4-FFF2-40B4-BE49-F238E27FC236}">
+                    <a16:creationId xmlns:a16="http://schemas.microsoft.com/office/drawing/2014/main" id="{855798CA-981D-3A56-EBBE-537522F4FF4C}"/>
+                  </a:ext>
+                </a:extLst>
+              </p:cNvPr>
+              <p:cNvSpPr txBox="1"/>
+              <p:nvPr/>
+            </p:nvSpPr>
+            <p:spPr>
+              <a:xfrm>
+                <a:off x="2207353" y="3609666"/>
+                <a:ext cx="3320992" cy="1026178"/>
+              </a:xfrm>
+              <a:prstGeom prst="rect">
+                <a:avLst/>
+              </a:prstGeom>
+              <a:noFill/>
+            </p:spPr>
+            <p:txBody>
+              <a:bodyPr wrap="square">
+                <a:spAutoFit/>
+              </a:bodyPr>
+              <a:lstStyle/>
+              <a:p>
+                <a:pPr/>
+                <a14:m>
+                  <m:oMathPara xmlns:m="http://schemas.openxmlformats.org/officeDocument/2006/math">
+                    <m:oMathParaPr>
+                      <m:jc m:val="centerGroup"/>
+                    </m:oMathParaPr>
+                    <m:oMath xmlns:m="http://schemas.openxmlformats.org/officeDocument/2006/math">
+                      <m:r>
+                        <a:rPr lang="en-US" altLang="ko-KR" b="0" i="1" spc="-50" smtClean="0">
+                          <a:latin typeface="Cambria Math" panose="02040503050406030204" pitchFamily="18" charset="0"/>
+                        </a:rPr>
+                        <m:t>𝐴</m:t>
+                      </m:r>
+                      <m:r>
+                        <a:rPr lang="en-US" altLang="ko-KR" b="0" i="1" spc="-50" smtClean="0">
+                          <a:latin typeface="Cambria Math" panose="02040503050406030204" pitchFamily="18" charset="0"/>
+                        </a:rPr>
+                        <m:t>=1−</m:t>
+                      </m:r>
+                      <m:sSup>
+                        <m:sSupPr>
+                          <m:ctrlPr>
+                            <a:rPr lang="en-US" altLang="ko-KR" b="0" i="1" spc="-50" smtClean="0">
+                              <a:latin typeface="Cambria Math" panose="02040503050406030204" pitchFamily="18" charset="0"/>
+                            </a:rPr>
+                          </m:ctrlPr>
+                        </m:sSupPr>
+                        <m:e>
+                          <m:d>
+                            <m:dPr>
+                              <m:begChr m:val="["/>
+                              <m:endChr m:val="]"/>
+                              <m:ctrlPr>
+                                <a:rPr lang="en-US" altLang="ko-KR" i="1" spc="-50">
+                                  <a:latin typeface="Cambria Math" panose="02040503050406030204" pitchFamily="18" charset="0"/>
+                                </a:rPr>
+                              </m:ctrlPr>
+                            </m:dPr>
+                            <m:e>
+                              <m:nary>
+                                <m:naryPr>
+                                  <m:chr m:val="∑"/>
+                                  <m:ctrlPr>
+                                    <a:rPr lang="en-US" altLang="ko-KR" i="1" spc="-50">
+                                      <a:latin typeface="Cambria Math" panose="02040503050406030204" pitchFamily="18" charset="0"/>
+                                    </a:rPr>
+                                  </m:ctrlPr>
+                                </m:naryPr>
+                                <m:sub>
+                                  <m:r>
+                                    <m:rPr>
+                                      <m:brk m:alnAt="23"/>
+                                    </m:rPr>
+                                    <a:rPr lang="en-US" altLang="ko-KR" i="1" spc="-50">
+                                      <a:latin typeface="Cambria Math" panose="02040503050406030204" pitchFamily="18" charset="0"/>
+                                    </a:rPr>
+                                    <m:t>𝑖</m:t>
+                                  </m:r>
+                                  <m:r>
+                                    <a:rPr lang="en-US" altLang="ko-KR" i="1" spc="-50">
+                                      <a:latin typeface="Cambria Math" panose="02040503050406030204" pitchFamily="18" charset="0"/>
+                                    </a:rPr>
+                                    <m:t>=1</m:t>
+                                  </m:r>
+                                </m:sub>
+                                <m:sup>
+                                  <m:r>
+                                    <a:rPr lang="en-US" altLang="ko-KR" i="1" spc="-50">
+                                      <a:latin typeface="Cambria Math" panose="02040503050406030204" pitchFamily="18" charset="0"/>
+                                    </a:rPr>
+                                    <m:t>𝑛</m:t>
+                                  </m:r>
+                                </m:sup>
+                                <m:e>
+                                  <m:sSup>
+                                    <m:sSupPr>
+                                      <m:ctrlPr>
+                                        <a:rPr lang="en-US" altLang="ko-KR" i="1" spc="-50">
+                                          <a:latin typeface="Cambria Math" panose="02040503050406030204" pitchFamily="18" charset="0"/>
+                                        </a:rPr>
+                                      </m:ctrlPr>
+                                    </m:sSupPr>
+                                    <m:e>
+                                      <m:f>
+                                        <m:fPr>
+                                          <m:ctrlPr>
+                                            <a:rPr lang="en-US" altLang="ko-KR" i="1" spc="-50">
+                                              <a:latin typeface="Cambria Math" panose="02040503050406030204" pitchFamily="18" charset="0"/>
+                                            </a:rPr>
+                                          </m:ctrlPr>
+                                        </m:fPr>
+                                        <m:num>
+                                          <m:sSub>
+                                            <m:sSubPr>
+                                              <m:ctrlPr>
+                                                <a:rPr lang="en-US" altLang="ko-KR" i="1" spc="-50">
+                                                  <a:latin typeface="Cambria Math" panose="02040503050406030204" pitchFamily="18" charset="0"/>
+                                                </a:rPr>
+                                              </m:ctrlPr>
+                                            </m:sSubPr>
+                                            <m:e>
+                                              <m:r>
+                                                <a:rPr lang="en-US" altLang="ko-KR" i="1" spc="-50">
+                                                  <a:latin typeface="Cambria Math" panose="02040503050406030204" pitchFamily="18" charset="0"/>
+                                                </a:rPr>
+                                                <m:t>𝑌</m:t>
+                                              </m:r>
+                                            </m:e>
+                                            <m:sub>
+                                              <m:r>
+                                                <a:rPr lang="en-US" altLang="ko-KR" i="1" spc="-50">
+                                                  <a:latin typeface="Cambria Math" panose="02040503050406030204" pitchFamily="18" charset="0"/>
+                                                </a:rPr>
+                                                <m:t>𝑖</m:t>
+                                              </m:r>
+                                            </m:sub>
+                                          </m:sSub>
+                                        </m:num>
+                                        <m:den>
+                                          <m:bar>
+                                            <m:barPr>
+                                              <m:pos m:val="top"/>
+                                              <m:ctrlPr>
+                                                <a:rPr lang="en-US" altLang="ko-KR" i="1" spc="-50">
+                                                  <a:latin typeface="Cambria Math" panose="02040503050406030204" pitchFamily="18" charset="0"/>
+                                                </a:rPr>
+                                              </m:ctrlPr>
+                                            </m:barPr>
+                                            <m:e>
+                                              <m:r>
+                                                <a:rPr lang="en-US" altLang="ko-KR" i="1" spc="-50">
+                                                  <a:latin typeface="Cambria Math" panose="02040503050406030204" pitchFamily="18" charset="0"/>
+                                                </a:rPr>
+                                                <m:t>𝑌</m:t>
+                                              </m:r>
+                                            </m:e>
+                                          </m:bar>
+                                        </m:den>
+                                      </m:f>
+                                    </m:e>
+                                    <m:sup>
+                                      <m:r>
+                                        <a:rPr lang="en-US" altLang="ko-KR" i="1" spc="-50">
+                                          <a:latin typeface="Cambria Math" panose="02040503050406030204" pitchFamily="18" charset="0"/>
+                                        </a:rPr>
+                                        <m:t>1−</m:t>
+                                      </m:r>
+                                      <m:r>
+                                        <a:rPr lang="ko-KR" altLang="en-US" i="1" spc="-50">
+                                          <a:latin typeface="Cambria Math" panose="02040503050406030204" pitchFamily="18" charset="0"/>
+                                        </a:rPr>
+                                        <m:t>𝜀</m:t>
+                                      </m:r>
+                                    </m:sup>
+                                  </m:sSup>
+                                </m:e>
+                              </m:nary>
+                              <m:sSub>
+                                <m:sSubPr>
+                                  <m:ctrlPr>
+                                    <a:rPr lang="en-US" altLang="ko-KR" i="1" spc="-50">
+                                      <a:latin typeface="Cambria Math" panose="02040503050406030204" pitchFamily="18" charset="0"/>
+                                    </a:rPr>
+                                  </m:ctrlPr>
+                                </m:sSubPr>
+                                <m:e>
+                                  <m:r>
+                                    <a:rPr lang="en-US" altLang="ko-KR" i="1" spc="-50">
+                                      <a:latin typeface="Cambria Math" panose="02040503050406030204" pitchFamily="18" charset="0"/>
+                                    </a:rPr>
+                                    <m:t>𝑓</m:t>
+                                  </m:r>
+                                </m:e>
+                                <m:sub>
+                                  <m:r>
+                                    <a:rPr lang="en-US" altLang="ko-KR" i="1" spc="-50">
+                                      <a:latin typeface="Cambria Math" panose="02040503050406030204" pitchFamily="18" charset="0"/>
+                                    </a:rPr>
+                                    <m:t>𝑖</m:t>
+                                  </m:r>
+                                </m:sub>
+                              </m:sSub>
+                            </m:e>
+                          </m:d>
+                        </m:e>
+                        <m:sup>
+                          <m:f>
+                            <m:fPr>
+                              <m:ctrlPr>
+                                <a:rPr lang="en-US" altLang="ko-KR" b="0" i="1" spc="-50" smtClean="0">
+                                  <a:latin typeface="Cambria Math" panose="02040503050406030204" pitchFamily="18" charset="0"/>
+                                </a:rPr>
+                              </m:ctrlPr>
+                            </m:fPr>
+                            <m:num>
+                              <m:r>
+                                <a:rPr lang="en-US" altLang="ko-KR" b="0" i="1" spc="-50" smtClean="0">
+                                  <a:latin typeface="Cambria Math" panose="02040503050406030204" pitchFamily="18" charset="0"/>
+                                </a:rPr>
+                                <m:t>1</m:t>
+                              </m:r>
+                            </m:num>
+                            <m:den>
+                              <m:r>
+                                <a:rPr lang="en-US" altLang="ko-KR" b="0" i="1" spc="-50" smtClean="0">
+                                  <a:latin typeface="Cambria Math" panose="02040503050406030204" pitchFamily="18" charset="0"/>
+                                </a:rPr>
+                                <m:t>1−</m:t>
+                              </m:r>
+                              <m:r>
+                                <a:rPr lang="ko-KR" altLang="en-US" b="0" i="1" spc="-50" smtClean="0">
+                                  <a:latin typeface="Cambria Math" panose="02040503050406030204" pitchFamily="18" charset="0"/>
+                                </a:rPr>
+                                <m:t>𝜀</m:t>
+                              </m:r>
+                            </m:den>
+                          </m:f>
+                        </m:sup>
+                      </m:sSup>
+                    </m:oMath>
+                  </m:oMathPara>
+                </a14:m>
+                <a:endParaRPr lang="ko-KR" altLang="en-US" dirty="0"/>
+              </a:p>
+            </p:txBody>
+          </p:sp>
+        </mc:Choice>
+        <mc:Fallback>
+          <p:sp>
+            <p:nvSpPr>
+              <p:cNvPr id="3" name="TextBox 2">
+                <a:extLst>
+                  <a:ext uri="{FF2B5EF4-FFF2-40B4-BE49-F238E27FC236}">
+                    <a16:creationId xmlns:a16="http://schemas.microsoft.com/office/drawing/2014/main" id="{855798CA-981D-3A56-EBBE-537522F4FF4C}"/>
+                  </a:ext>
+                </a:extLst>
+              </p:cNvPr>
+              <p:cNvSpPr txBox="1">
+                <a:spLocks noRot="1" noChangeAspect="1" noMove="1" noResize="1" noEditPoints="1" noAdjustHandles="1" noChangeArrowheads="1" noChangeShapeType="1" noTextEdit="1"/>
+              </p:cNvSpPr>
+              <p:nvPr/>
+            </p:nvSpPr>
+            <p:spPr>
+              <a:xfrm>
+                <a:off x="2207353" y="3609666"/>
+                <a:ext cx="3320992" cy="1026178"/>
+              </a:xfrm>
+              <a:prstGeom prst="rect">
+                <a:avLst/>
+              </a:prstGeom>
+              <a:blipFill>
+                <a:blip r:embed="rId4"/>
+                <a:stretch>
+                  <a:fillRect/>
+                </a:stretch>
+              </a:blipFill>
+            </p:spPr>
+            <p:txBody>
+              <a:bodyPr/>
+              <a:lstStyle/>
+              <a:p>
+                <a:r>
+                  <a:rPr lang="ko-KR" altLang="en-US">
+                    <a:noFill/>
+                  </a:rPr>
+                  <a:t> </a:t>
+                </a:r>
+              </a:p>
+            </p:txBody>
+          </p:sp>
+        </mc:Fallback>
+      </mc:AlternateContent>
     </p:spTree>
     <p:extLst>
       <p:ext uri="{BB962C8B-B14F-4D97-AF65-F5344CB8AC3E}">
-        <p14:creationId xmlns:p14="http://schemas.microsoft.com/office/powerpoint/2010/main" val="2545617223"/>
+        <p14:creationId xmlns:p14="http://schemas.microsoft.com/office/powerpoint/2010/main" val="110612317"/>
       </p:ext>
     </p:extLst>
   </p:cSld>
@@ -13362,6 +14580,642 @@
         <p:cNvPr id="1" name="">
           <a:extLst>
             <a:ext uri="{FF2B5EF4-FFF2-40B4-BE49-F238E27FC236}">
+              <a16:creationId xmlns:a16="http://schemas.microsoft.com/office/drawing/2014/main" id="{000D1EC5-A470-8A1E-5DCF-1E04A904FCDD}"/>
+            </a:ext>
+          </a:extLst>
+        </p:cNvPr>
+        <p:cNvGrpSpPr/>
+        <p:nvPr/>
+      </p:nvGrpSpPr>
+      <p:grpSpPr>
+        <a:xfrm>
+          <a:off x="0" y="0"/>
+          <a:ext cx="0" cy="0"/>
+          <a:chOff x="0" y="0"/>
+          <a:chExt cx="0" cy="0"/>
+        </a:xfrm>
+      </p:grpSpPr>
+      <p:pic>
+        <p:nvPicPr>
+          <p:cNvPr id="6" name="그림 5" descr="텍스트, 로고, 원, 폰트이(가) 표시된 사진&#10;&#10;AI 생성 콘텐츠는 정확하지 않을 수 있습니다.">
+            <a:extLst>
+              <a:ext uri="{FF2B5EF4-FFF2-40B4-BE49-F238E27FC236}">
+                <a16:creationId xmlns:a16="http://schemas.microsoft.com/office/drawing/2014/main" id="{FE1FA9FD-0CB3-0347-F9C2-F0B5D5A337FD}"/>
+              </a:ext>
+            </a:extLst>
+          </p:cNvPr>
+          <p:cNvPicPr>
+            <a:picLocks noChangeAspect="1"/>
+          </p:cNvPicPr>
+          <p:nvPr/>
+        </p:nvPicPr>
+        <p:blipFill>
+          <a:blip r:embed="rId2">
+            <a:alphaModFix amt="20000"/>
+            <a:extLst>
+              <a:ext uri="{28A0092B-C50C-407E-A947-70E740481C1C}">
+                <a14:useLocalDpi xmlns:a14="http://schemas.microsoft.com/office/drawing/2010/main" val="0"/>
+              </a:ext>
+            </a:extLst>
+          </a:blip>
+          <a:stretch>
+            <a:fillRect/>
+          </a:stretch>
+        </p:blipFill>
+        <p:spPr>
+          <a:xfrm>
+            <a:off x="4012070" y="1673061"/>
+            <a:ext cx="4167861" cy="4167861"/>
+          </a:xfrm>
+          <a:prstGeom prst="rect">
+            <a:avLst/>
+          </a:prstGeom>
+        </p:spPr>
+      </p:pic>
+      <p:sp>
+        <p:nvSpPr>
+          <p:cNvPr id="4" name="슬라이드 번호 개체 틀 3">
+            <a:extLst>
+              <a:ext uri="{FF2B5EF4-FFF2-40B4-BE49-F238E27FC236}">
+                <a16:creationId xmlns:a16="http://schemas.microsoft.com/office/drawing/2014/main" id="{E16C89AD-4657-B5E9-DF15-42E8C5FB7B83}"/>
+              </a:ext>
+            </a:extLst>
+          </p:cNvPr>
+          <p:cNvSpPr>
+            <a:spLocks noGrp="1"/>
+          </p:cNvSpPr>
+          <p:nvPr>
+            <p:ph type="sldNum" sz="quarter" idx="12"/>
+          </p:nvPr>
+        </p:nvSpPr>
+        <p:spPr/>
+        <p:txBody>
+          <a:bodyPr/>
+          <a:lstStyle/>
+          <a:p>
+            <a:fld id="{109C872D-39A9-4065-8BF3-6A613116E2A1}" type="slidenum">
+              <a:rPr lang="ko-KR" altLang="en-US" smtClean="0"/>
+              <a:t>20</a:t>
+            </a:fld>
+            <a:endParaRPr lang="ko-KR" altLang="en-US"/>
+          </a:p>
+        </p:txBody>
+      </p:sp>
+      <p:sp>
+        <p:nvSpPr>
+          <p:cNvPr id="7" name="제목 1">
+            <a:extLst>
+              <a:ext uri="{FF2B5EF4-FFF2-40B4-BE49-F238E27FC236}">
+                <a16:creationId xmlns:a16="http://schemas.microsoft.com/office/drawing/2014/main" id="{369F4F89-EECA-252F-74CA-0DD0D19AEA04}"/>
+              </a:ext>
+            </a:extLst>
+          </p:cNvPr>
+          <p:cNvSpPr>
+            <a:spLocks noGrp="1"/>
+          </p:cNvSpPr>
+          <p:nvPr>
+            <p:ph type="title"/>
+          </p:nvPr>
+        </p:nvSpPr>
+        <p:spPr>
+          <a:xfrm>
+            <a:off x="831850" y="3765550"/>
+            <a:ext cx="11150600" cy="652818"/>
+          </a:xfrm>
+          <a:effectLst>
+            <a:reflection blurRad="50800" stA="45000" endPos="44000" dir="5400000" sy="-100000" algn="bl" rotWithShape="0"/>
+          </a:effectLst>
+        </p:spPr>
+        <p:txBody>
+          <a:bodyPr anchor="b"/>
+          <a:lstStyle/>
+          <a:p>
+            <a:r>
+              <a:rPr lang="en-US" altLang="ko-KR" sz="4000" b="1" i="0" spc="150" dirty="0"/>
+              <a:t>Section 4. </a:t>
+            </a:r>
+            <a:r>
+              <a:rPr lang="ko-KR" altLang="en-US" sz="4000" b="1" i="0" spc="150" dirty="0"/>
+              <a:t>불평등 발생의 원인</a:t>
+            </a:r>
+            <a:endParaRPr lang="ko-KR" altLang="en-US" sz="3600" i="0" spc="150" dirty="0"/>
+          </a:p>
+        </p:txBody>
+      </p:sp>
+    </p:spTree>
+    <p:extLst>
+      <p:ext uri="{BB962C8B-B14F-4D97-AF65-F5344CB8AC3E}">
+        <p14:creationId xmlns:p14="http://schemas.microsoft.com/office/powerpoint/2010/main" val="1262055516"/>
+      </p:ext>
+    </p:extLst>
+  </p:cSld>
+  <p:clrMapOvr>
+    <a:masterClrMapping/>
+  </p:clrMapOvr>
+</p:sld>
+</file>
+
+<file path=ppt/slides/slide21.xml><?xml version="1.0" encoding="utf-8"?>
+<p:sld xmlns:a="http://schemas.openxmlformats.org/drawingml/2006/main" xmlns:r="http://schemas.openxmlformats.org/officeDocument/2006/relationships" xmlns:p="http://schemas.openxmlformats.org/presentationml/2006/main">
+  <p:cSld>
+    <p:spTree>
+      <p:nvGrpSpPr>
+        <p:cNvPr id="1" name="">
+          <a:extLst>
+            <a:ext uri="{FF2B5EF4-FFF2-40B4-BE49-F238E27FC236}">
+              <a16:creationId xmlns:a16="http://schemas.microsoft.com/office/drawing/2014/main" id="{E3059759-B7AA-01F8-4E91-95B7F1838C40}"/>
+            </a:ext>
+          </a:extLst>
+        </p:cNvPr>
+        <p:cNvGrpSpPr/>
+        <p:nvPr/>
+      </p:nvGrpSpPr>
+      <p:grpSpPr>
+        <a:xfrm>
+          <a:off x="0" y="0"/>
+          <a:ext cx="0" cy="0"/>
+          <a:chOff x="0" y="0"/>
+          <a:chExt cx="0" cy="0"/>
+        </a:xfrm>
+      </p:grpSpPr>
+      <p:sp>
+        <p:nvSpPr>
+          <p:cNvPr id="2" name="제목 1">
+            <a:extLst>
+              <a:ext uri="{FF2B5EF4-FFF2-40B4-BE49-F238E27FC236}">
+                <a16:creationId xmlns:a16="http://schemas.microsoft.com/office/drawing/2014/main" id="{F4D6A1B8-BCBB-9E4E-2B81-5C3FD87C6F24}"/>
+              </a:ext>
+            </a:extLst>
+          </p:cNvPr>
+          <p:cNvSpPr>
+            <a:spLocks noGrp="1"/>
+          </p:cNvSpPr>
+          <p:nvPr>
+            <p:ph type="title"/>
+          </p:nvPr>
+        </p:nvSpPr>
+        <p:spPr/>
+        <p:txBody>
+          <a:bodyPr/>
+          <a:lstStyle/>
+          <a:p>
+            <a:r>
+              <a:rPr lang="ko-KR" altLang="en-US" dirty="0"/>
+              <a:t>개인적요인</a:t>
+            </a:r>
+          </a:p>
+        </p:txBody>
+      </p:sp>
+      <p:sp>
+        <p:nvSpPr>
+          <p:cNvPr id="4" name="슬라이드 번호 개체 틀 3">
+            <a:extLst>
+              <a:ext uri="{FF2B5EF4-FFF2-40B4-BE49-F238E27FC236}">
+                <a16:creationId xmlns:a16="http://schemas.microsoft.com/office/drawing/2014/main" id="{1882AAF2-1245-774B-93DD-7D6E504B0E50}"/>
+              </a:ext>
+            </a:extLst>
+          </p:cNvPr>
+          <p:cNvSpPr>
+            <a:spLocks noGrp="1"/>
+          </p:cNvSpPr>
+          <p:nvPr>
+            <p:ph type="sldNum" sz="quarter" idx="12"/>
+          </p:nvPr>
+        </p:nvSpPr>
+        <p:spPr/>
+        <p:txBody>
+          <a:bodyPr/>
+          <a:lstStyle/>
+          <a:p>
+            <a:fld id="{109C872D-39A9-4065-8BF3-6A613116E2A1}" type="slidenum">
+              <a:rPr lang="ko-KR" altLang="en-US" smtClean="0"/>
+              <a:t>21</a:t>
+            </a:fld>
+            <a:endParaRPr lang="ko-KR" altLang="en-US"/>
+          </a:p>
+        </p:txBody>
+      </p:sp>
+      <p:sp>
+        <p:nvSpPr>
+          <p:cNvPr id="5" name="TextBox 4">
+            <a:extLst>
+              <a:ext uri="{FF2B5EF4-FFF2-40B4-BE49-F238E27FC236}">
+                <a16:creationId xmlns:a16="http://schemas.microsoft.com/office/drawing/2014/main" id="{E535292A-862D-590E-A579-61ED220DBBD8}"/>
+              </a:ext>
+            </a:extLst>
+          </p:cNvPr>
+          <p:cNvSpPr txBox="1"/>
+          <p:nvPr/>
+        </p:nvSpPr>
+        <p:spPr>
+          <a:xfrm>
+            <a:off x="288790" y="958844"/>
+            <a:ext cx="11250267" cy="2676182"/>
+          </a:xfrm>
+          <a:prstGeom prst="rect">
+            <a:avLst/>
+          </a:prstGeom>
+          <a:noFill/>
+        </p:spPr>
+        <p:txBody>
+          <a:bodyPr wrap="square" rtlCol="0" anchor="t">
+            <a:spAutoFit/>
+          </a:bodyPr>
+          <a:lstStyle/>
+          <a:p>
+            <a:pPr marL="377825" indent="-285750">
+              <a:lnSpc>
+                <a:spcPct val="150000"/>
+              </a:lnSpc>
+              <a:buFont typeface="Arial" panose="020B0604020202020204" pitchFamily="34" charset="0"/>
+              <a:buChar char="•"/>
+            </a:pPr>
+            <a:r>
+              <a:rPr lang="ko-KR" altLang="en-US" sz="1600" spc="-50" dirty="0"/>
+              <a:t>소득분배 혹은 경제적지위의 불평등을 발생시키는 원인은 크게 개인적 요인과 사회적 요인</a:t>
+            </a:r>
+            <a:r>
+              <a:rPr lang="en-US" altLang="ko-KR" sz="1600" spc="-50" dirty="0"/>
+              <a:t>, </a:t>
+            </a:r>
+            <a:r>
+              <a:rPr lang="ko-KR" altLang="en-US" sz="1600" spc="-50" dirty="0"/>
+              <a:t>두 범주로 나누어 볼 수 있다</a:t>
+            </a:r>
+            <a:r>
+              <a:rPr lang="en-US" altLang="ko-KR" sz="1600" spc="-50" dirty="0"/>
+              <a:t>.</a:t>
+            </a:r>
+          </a:p>
+          <a:p>
+            <a:pPr>
+              <a:lnSpc>
+                <a:spcPct val="150000"/>
+              </a:lnSpc>
+            </a:pPr>
+            <a:r>
+              <a:rPr lang="ko-KR" altLang="en-US" u="sng" dirty="0">
+                <a:ln w="3175">
+                  <a:noFill/>
+                </a:ln>
+                <a:latin typeface="HY헤드라인M" panose="02030600000101010101" pitchFamily="18" charset="-127"/>
+                <a:ea typeface="HY헤드라인M" panose="02030600000101010101" pitchFamily="18" charset="-127"/>
+              </a:rPr>
+              <a:t>개인적 요인</a:t>
+            </a:r>
+            <a:endParaRPr lang="en-US" altLang="ko-KR" sz="400" u="sng" dirty="0">
+              <a:ln w="3175">
+                <a:noFill/>
+              </a:ln>
+              <a:latin typeface="HY헤드라인M" panose="02030600000101010101" pitchFamily="18" charset="-127"/>
+              <a:ea typeface="HY헤드라인M" panose="02030600000101010101" pitchFamily="18" charset="-127"/>
+            </a:endParaRPr>
+          </a:p>
+          <a:p>
+            <a:pPr marL="434975" indent="-342900">
+              <a:lnSpc>
+                <a:spcPct val="150000"/>
+              </a:lnSpc>
+              <a:buFont typeface="+mj-lt"/>
+              <a:buAutoNum type="arabicPeriod"/>
+            </a:pPr>
+            <a:r>
+              <a:rPr lang="ko-KR" altLang="en-US" sz="1600" b="1" spc="-50" dirty="0"/>
+              <a:t>원초적 단계</a:t>
+            </a:r>
+            <a:r>
+              <a:rPr lang="en-US" altLang="ko-KR" sz="1600" spc="-50" dirty="0"/>
+              <a:t>: </a:t>
+            </a:r>
+            <a:r>
+              <a:rPr lang="ko-KR" altLang="en-US" sz="1600" spc="-50" dirty="0"/>
+              <a:t>인생의 가장 원초적인 단계에서 발생하는 불평등의 원인들은 다음과 같이 세 가지로 정리해 볼 수 있다</a:t>
+            </a:r>
+            <a:r>
+              <a:rPr lang="en-US" altLang="ko-KR" sz="1600" spc="-50" dirty="0"/>
+              <a:t>.</a:t>
+            </a:r>
+          </a:p>
+          <a:p>
+            <a:pPr marL="835200" lvl="1" indent="-284400">
+              <a:lnSpc>
+                <a:spcPct val="150000"/>
+              </a:lnSpc>
+              <a:buFont typeface="Wingdings" panose="05000000000000000000" pitchFamily="2" charset="2"/>
+              <a:buChar char="ü"/>
+            </a:pPr>
+            <a:r>
+              <a:rPr lang="ko-KR" altLang="en-US" sz="1600" b="1" spc="-50" dirty="0"/>
+              <a:t>유전적 요인</a:t>
+            </a:r>
+            <a:r>
+              <a:rPr lang="en-US" altLang="ko-KR" sz="1600" spc="-50" dirty="0"/>
+              <a:t>: </a:t>
+            </a:r>
+            <a:r>
+              <a:rPr lang="ko-KR" altLang="en-US" sz="1600" spc="-50" dirty="0"/>
+              <a:t>태어날 때부터 갖고 있는 유전자가 경제적 지위에 영향을 주는 것을 말한다</a:t>
+            </a:r>
+            <a:r>
+              <a:rPr lang="en-US" altLang="ko-KR" sz="1600" spc="-50" dirty="0"/>
+              <a:t>.</a:t>
+            </a:r>
+          </a:p>
+          <a:p>
+            <a:pPr marL="835200" lvl="1" indent="-284400">
+              <a:lnSpc>
+                <a:spcPct val="150000"/>
+              </a:lnSpc>
+              <a:buFont typeface="Wingdings" panose="05000000000000000000" pitchFamily="2" charset="2"/>
+              <a:buChar char="ü"/>
+            </a:pPr>
+            <a:r>
+              <a:rPr lang="ko-KR" altLang="en-US" sz="1600" b="1" spc="-50" dirty="0"/>
+              <a:t>교육적 환경</a:t>
+            </a:r>
+            <a:r>
+              <a:rPr lang="en-US" altLang="ko-KR" sz="1600" spc="-50" dirty="0"/>
+              <a:t>: </a:t>
+            </a:r>
+            <a:r>
+              <a:rPr lang="ko-KR" altLang="en-US" sz="1600" spc="-50" dirty="0"/>
+              <a:t>후천적 성장과정이 그의 경제적 지위에 영향을 주는 것을 말한다</a:t>
+            </a:r>
+            <a:r>
+              <a:rPr lang="en-US" altLang="ko-KR" sz="1600" spc="-50" dirty="0"/>
+              <a:t>.</a:t>
+            </a:r>
+          </a:p>
+          <a:p>
+            <a:pPr marL="835200" lvl="1" indent="-284400">
+              <a:lnSpc>
+                <a:spcPct val="150000"/>
+              </a:lnSpc>
+              <a:buFont typeface="Wingdings" panose="05000000000000000000" pitchFamily="2" charset="2"/>
+              <a:buChar char="ü"/>
+            </a:pPr>
+            <a:r>
+              <a:rPr lang="ko-KR" altLang="en-US" sz="1600" b="1" spc="-50" dirty="0"/>
+              <a:t>경제적 환경</a:t>
+            </a:r>
+            <a:r>
+              <a:rPr lang="en-US" altLang="ko-KR" sz="1600" spc="-50" dirty="0"/>
+              <a:t>: </a:t>
+            </a:r>
+            <a:r>
+              <a:rPr lang="ko-KR" altLang="en-US" sz="1600" spc="-50" dirty="0"/>
+              <a:t>유복한 집안에서 태어난 사람은 교육 기회</a:t>
+            </a:r>
+            <a:r>
+              <a:rPr lang="en-US" altLang="ko-KR" sz="1600" spc="-50" dirty="0"/>
+              <a:t> </a:t>
+            </a:r>
+            <a:r>
+              <a:rPr lang="ko-KR" altLang="en-US" sz="1600" spc="-50" dirty="0"/>
+              <a:t>혹은 다른 측면에서 유리한 여건을 갖는 것을 말한다</a:t>
+            </a:r>
+            <a:r>
+              <a:rPr lang="en-US" altLang="ko-KR" sz="1600" spc="-50" dirty="0"/>
+              <a:t>.</a:t>
+            </a:r>
+          </a:p>
+          <a:p>
+            <a:pPr marL="835200" lvl="1" indent="-284400">
+              <a:lnSpc>
+                <a:spcPct val="150000"/>
+              </a:lnSpc>
+              <a:buFont typeface="Wingdings" panose="05000000000000000000" pitchFamily="2" charset="2"/>
+              <a:buChar char="ü"/>
+            </a:pPr>
+            <a:endParaRPr lang="en-US" altLang="ko-KR" sz="1600" spc="-50" dirty="0"/>
+          </a:p>
+        </p:txBody>
+      </p:sp>
+      <p:pic>
+        <p:nvPicPr>
+          <p:cNvPr id="3" name="그림 2">
+            <a:extLst>
+              <a:ext uri="{FF2B5EF4-FFF2-40B4-BE49-F238E27FC236}">
+                <a16:creationId xmlns:a16="http://schemas.microsoft.com/office/drawing/2014/main" id="{D8396D40-027D-3B4E-FB85-FB711D5392E4}"/>
+              </a:ext>
+            </a:extLst>
+          </p:cNvPr>
+          <p:cNvPicPr>
+            <a:picLocks noChangeAspect="1"/>
+          </p:cNvPicPr>
+          <p:nvPr/>
+        </p:nvPicPr>
+        <p:blipFill>
+          <a:blip r:embed="rId2" cstate="print">
+            <a:extLst>
+              <a:ext uri="{28A0092B-C50C-407E-A947-70E740481C1C}">
+                <a14:useLocalDpi xmlns:a14="http://schemas.microsoft.com/office/drawing/2010/main" val="0"/>
+              </a:ext>
+            </a:extLst>
+          </a:blip>
+          <a:srcRect l="20886" t="11647" r="21093" b="6029"/>
+          <a:stretch>
+            <a:fillRect/>
+          </a:stretch>
+        </p:blipFill>
+        <p:spPr>
+          <a:xfrm>
+            <a:off x="8320655" y="3202798"/>
+            <a:ext cx="3411348" cy="3409102"/>
+          </a:xfrm>
+          <a:prstGeom prst="rect">
+            <a:avLst/>
+          </a:prstGeom>
+        </p:spPr>
+      </p:pic>
+      <p:sp>
+        <p:nvSpPr>
+          <p:cNvPr id="6" name="TextBox 5">
+            <a:extLst>
+              <a:ext uri="{FF2B5EF4-FFF2-40B4-BE49-F238E27FC236}">
+                <a16:creationId xmlns:a16="http://schemas.microsoft.com/office/drawing/2014/main" id="{047F5C63-668E-2D40-F00F-90BE55E882F6}"/>
+              </a:ext>
+            </a:extLst>
+          </p:cNvPr>
+          <p:cNvSpPr txBox="1"/>
+          <p:nvPr/>
+        </p:nvSpPr>
+        <p:spPr>
+          <a:xfrm>
+            <a:off x="7805605" y="3254500"/>
+            <a:ext cx="1491495" cy="276999"/>
+          </a:xfrm>
+          <a:prstGeom prst="rect">
+            <a:avLst/>
+          </a:prstGeom>
+          <a:noFill/>
+        </p:spPr>
+        <p:txBody>
+          <a:bodyPr wrap="square">
+            <a:spAutoFit/>
+          </a:bodyPr>
+          <a:lstStyle/>
+          <a:p>
+            <a:pPr algn="ctr"/>
+            <a:r>
+              <a:rPr lang="en-US" altLang="ko-KR" sz="1200" spc="-50" dirty="0"/>
+              <a:t>&lt;</a:t>
+            </a:r>
+            <a:r>
+              <a:rPr lang="ko-KR" altLang="en-US" sz="1200" spc="-50" dirty="0"/>
+              <a:t>불평등 발생경로</a:t>
+            </a:r>
+            <a:r>
+              <a:rPr lang="en-US" altLang="ko-KR" sz="1200" spc="-50" dirty="0"/>
+              <a:t>&gt;</a:t>
+            </a:r>
+            <a:endParaRPr lang="ko-KR" altLang="en-US" sz="1200" dirty="0"/>
+          </a:p>
+        </p:txBody>
+      </p:sp>
+      <p:sp>
+        <p:nvSpPr>
+          <p:cNvPr id="7" name="TextBox 6">
+            <a:extLst>
+              <a:ext uri="{FF2B5EF4-FFF2-40B4-BE49-F238E27FC236}">
+                <a16:creationId xmlns:a16="http://schemas.microsoft.com/office/drawing/2014/main" id="{0E001C50-0C9B-D5B8-DBC4-304CD5EE77AC}"/>
+              </a:ext>
+            </a:extLst>
+          </p:cNvPr>
+          <p:cNvSpPr txBox="1"/>
+          <p:nvPr/>
+        </p:nvSpPr>
+        <p:spPr>
+          <a:xfrm>
+            <a:off x="288789" y="3274228"/>
+            <a:ext cx="7516816" cy="2630015"/>
+          </a:xfrm>
+          <a:prstGeom prst="rect">
+            <a:avLst/>
+          </a:prstGeom>
+          <a:noFill/>
+        </p:spPr>
+        <p:txBody>
+          <a:bodyPr wrap="square" rtlCol="0" anchor="t">
+            <a:spAutoFit/>
+          </a:bodyPr>
+          <a:lstStyle/>
+          <a:p>
+            <a:pPr marL="377825" indent="-285750">
+              <a:lnSpc>
+                <a:spcPct val="150000"/>
+              </a:lnSpc>
+              <a:buFont typeface="Arial" panose="020B0604020202020204" pitchFamily="34" charset="0"/>
+              <a:buChar char="•"/>
+            </a:pPr>
+            <a:r>
+              <a:rPr lang="ko-KR" altLang="en-US" sz="1600" spc="-50" dirty="0"/>
+              <a:t>그림에서 가장 안쪽에 있는 것이 개인적 차원에서 발생하는 불평등 요인이다</a:t>
+            </a:r>
+            <a:r>
+              <a:rPr lang="en-US" altLang="ko-KR" sz="1600" spc="-50" dirty="0"/>
+              <a:t>.</a:t>
+            </a:r>
+          </a:p>
+          <a:p>
+            <a:pPr marL="835025" lvl="1" indent="-285750">
+              <a:lnSpc>
+                <a:spcPct val="150000"/>
+              </a:lnSpc>
+              <a:buFont typeface="Wingdings" panose="05000000000000000000" pitchFamily="2" charset="2"/>
+              <a:buChar char="ü"/>
+            </a:pPr>
+            <a:r>
+              <a:rPr lang="ko-KR" altLang="en-US" sz="1600" spc="-50" dirty="0"/>
+              <a:t>원초적 요인들이 싹터 불평등이 중간단계의 차이로 이어지고</a:t>
+            </a:r>
+            <a:r>
+              <a:rPr lang="en-US" altLang="ko-KR" sz="1600" spc="-50" dirty="0"/>
+              <a:t>, </a:t>
+            </a:r>
+            <a:r>
+              <a:rPr lang="ko-KR" altLang="en-US" sz="1600" spc="-50" dirty="0"/>
+              <a:t>결국은 맨 윗줄에 있는 경제적 지위의 결정요인으로 귀착되는 것을 보여주고 있다</a:t>
+            </a:r>
+            <a:r>
+              <a:rPr lang="en-US" altLang="ko-KR" sz="1600" spc="-50" dirty="0"/>
+              <a:t>.</a:t>
+            </a:r>
+          </a:p>
+          <a:p>
+            <a:pPr marL="377825" indent="-285750">
+              <a:lnSpc>
+                <a:spcPct val="150000"/>
+              </a:lnSpc>
+              <a:buFont typeface="Arial" panose="020B0604020202020204" pitchFamily="34" charset="0"/>
+              <a:buChar char="•"/>
+            </a:pPr>
+            <a:r>
+              <a:rPr lang="ko-KR" altLang="en-US" sz="1600" spc="-50" dirty="0"/>
+              <a:t>결국 개인적인 차원에서의 불평등의 싹은 가정에서 출발한다</a:t>
+            </a:r>
+            <a:r>
+              <a:rPr lang="en-US" altLang="ko-KR" sz="1600" spc="-50" dirty="0"/>
+              <a:t>.</a:t>
+            </a:r>
+          </a:p>
+          <a:p>
+            <a:pPr marL="835025" lvl="1" indent="-285750">
+              <a:lnSpc>
+                <a:spcPct val="150000"/>
+              </a:lnSpc>
+              <a:buFont typeface="Wingdings" panose="05000000000000000000" pitchFamily="2" charset="2"/>
+              <a:buChar char="ü"/>
+            </a:pPr>
+            <a:r>
+              <a:rPr lang="ko-KR" altLang="en-US" sz="1600" spc="-50" dirty="0"/>
+              <a:t>어떤 사람이 어느 가정에서 어떤 소질을 가지고 태어났느냐가 그 사람의 경제적인 장래를 좌우한다는 말이다</a:t>
+            </a:r>
+            <a:r>
+              <a:rPr lang="en-US" altLang="ko-KR" sz="1600" spc="-50" dirty="0"/>
+              <a:t>.</a:t>
+            </a:r>
+          </a:p>
+          <a:p>
+            <a:pPr marL="835025" lvl="1" indent="-285750">
+              <a:lnSpc>
+                <a:spcPct val="150000"/>
+              </a:lnSpc>
+              <a:buFont typeface="Wingdings" panose="05000000000000000000" pitchFamily="2" charset="2"/>
+              <a:buChar char="ü"/>
+            </a:pPr>
+            <a:r>
+              <a:rPr lang="ko-KR" altLang="en-US" sz="1600" spc="-50" dirty="0"/>
+              <a:t>가정이 개인적 차원에서 발생하는 불평등에 얼마나 중요한지 알 수 있다</a:t>
+            </a:r>
+            <a:r>
+              <a:rPr lang="en-US" altLang="ko-KR" sz="1600" spc="-50" dirty="0"/>
+              <a:t>.</a:t>
+            </a:r>
+          </a:p>
+        </p:txBody>
+      </p:sp>
+    </p:spTree>
+    <p:extLst>
+      <p:ext uri="{BB962C8B-B14F-4D97-AF65-F5344CB8AC3E}">
+        <p14:creationId xmlns:p14="http://schemas.microsoft.com/office/powerpoint/2010/main" val="2545617223"/>
+      </p:ext>
+    </p:extLst>
+  </p:cSld>
+  <p:clrMapOvr>
+    <a:masterClrMapping/>
+  </p:clrMapOvr>
+</p:sld>
+</file>
+
+<file path=ppt/slides/slide22.xml><?xml version="1.0" encoding="utf-8"?>
+<p:sld xmlns:a="http://schemas.openxmlformats.org/drawingml/2006/main" xmlns:r="http://schemas.openxmlformats.org/officeDocument/2006/relationships" xmlns:p="http://schemas.openxmlformats.org/presentationml/2006/main">
+  <p:cSld>
+    <p:spTree>
+      <p:nvGrpSpPr>
+        <p:cNvPr id="1" name="">
+          <a:extLst>
+            <a:ext uri="{FF2B5EF4-FFF2-40B4-BE49-F238E27FC236}">
               <a16:creationId xmlns:a16="http://schemas.microsoft.com/office/drawing/2014/main" id="{06298376-8C19-3CF4-8F99-490067760548}"/>
             </a:ext>
           </a:extLst>
@@ -13428,7 +15282,7 @@
           <a:p>
             <a:fld id="{109C872D-39A9-4065-8BF3-6A613116E2A1}" type="slidenum">
               <a:rPr lang="ko-KR" altLang="en-US" smtClean="0"/>
-              <a:t>20</a:t>
+              <a:t>22</a:t>
             </a:fld>
             <a:endParaRPr lang="ko-KR" altLang="en-US"/>
           </a:p>
@@ -13813,7 +15667,7 @@
 </p:sld>
 </file>
 
-<file path=ppt/slides/slide21.xml><?xml version="1.0" encoding="utf-8"?>
+<file path=ppt/slides/slide23.xml><?xml version="1.0" encoding="utf-8"?>
 <p:sld xmlns:a="http://schemas.openxmlformats.org/drawingml/2006/main" xmlns:r="http://schemas.openxmlformats.org/officeDocument/2006/relationships" xmlns:p="http://schemas.openxmlformats.org/presentationml/2006/main">
   <p:cSld>
     <p:spTree>
@@ -13887,7 +15741,7 @@
           <a:p>
             <a:fld id="{109C872D-39A9-4065-8BF3-6A613116E2A1}" type="slidenum">
               <a:rPr lang="ko-KR" altLang="en-US" smtClean="0"/>
-              <a:t>21</a:t>
+              <a:t>23</a:t>
             </a:fld>
             <a:endParaRPr lang="ko-KR" altLang="en-US"/>
           </a:p>
@@ -14197,7 +16051,7 @@
 </p:sld>
 </file>
 
-<file path=ppt/slides/slide22.xml><?xml version="1.0" encoding="utf-8"?>
+<file path=ppt/slides/slide24.xml><?xml version="1.0" encoding="utf-8"?>
 <p:sld xmlns:a="http://schemas.openxmlformats.org/drawingml/2006/main" xmlns:r="http://schemas.openxmlformats.org/officeDocument/2006/relationships" xmlns:p="http://schemas.openxmlformats.org/presentationml/2006/main">
   <p:cSld>
     <p:spTree>
@@ -14271,7 +16125,7 @@
           <a:p>
             <a:fld id="{109C872D-39A9-4065-8BF3-6A613116E2A1}" type="slidenum">
               <a:rPr lang="ko-KR" altLang="en-US" smtClean="0"/>
-              <a:t>22</a:t>
+              <a:t>24</a:t>
             </a:fld>
             <a:endParaRPr lang="ko-KR" altLang="en-US"/>
           </a:p>
@@ -14667,7 +16521,7 @@
 </p:sld>
 </file>
 
-<file path=ppt/slides/slide23.xml><?xml version="1.0" encoding="utf-8"?>
+<file path=ppt/slides/slide25.xml><?xml version="1.0" encoding="utf-8"?>
 <p:sld xmlns:a="http://schemas.openxmlformats.org/drawingml/2006/main" xmlns:r="http://schemas.openxmlformats.org/officeDocument/2006/relationships" xmlns:p="http://schemas.openxmlformats.org/presentationml/2006/main">
   <p:cSld>
     <p:spTree>
@@ -14741,7 +16595,7 @@
           <a:p>
             <a:fld id="{109C872D-39A9-4065-8BF3-6A613116E2A1}" type="slidenum">
               <a:rPr lang="ko-KR" altLang="en-US" smtClean="0"/>
-              <a:t>23</a:t>
+              <a:t>25</a:t>
             </a:fld>
             <a:endParaRPr lang="ko-KR" altLang="en-US"/>
           </a:p>
@@ -14919,7 +16773,7 @@
 </p:sld>
 </file>
 
-<file path=ppt/slides/slide24.xml><?xml version="1.0" encoding="utf-8"?>
+<file path=ppt/slides/slide26.xml><?xml version="1.0" encoding="utf-8"?>
 <p:sld xmlns:a="http://schemas.openxmlformats.org/drawingml/2006/main" xmlns:r="http://schemas.openxmlformats.org/officeDocument/2006/relationships" xmlns:p="http://schemas.openxmlformats.org/presentationml/2006/main">
   <p:cSld>
     <p:spTree>
@@ -14993,7 +16847,7 @@
           <a:p>
             <a:fld id="{109C872D-39A9-4065-8BF3-6A613116E2A1}" type="slidenum">
               <a:rPr lang="ko-KR" altLang="en-US" smtClean="0"/>
-              <a:t>24</a:t>
+              <a:t>26</a:t>
             </a:fld>
             <a:endParaRPr lang="ko-KR" altLang="en-US"/>
           </a:p>
@@ -15390,7 +17244,7 @@
 </p:sld>
 </file>
 
-<file path=ppt/slides/slide25.xml><?xml version="1.0" encoding="utf-8"?>
+<file path=ppt/slides/slide27.xml><?xml version="1.0" encoding="utf-8"?>
 <p:sld xmlns:a="http://schemas.openxmlformats.org/drawingml/2006/main" xmlns:r="http://schemas.openxmlformats.org/officeDocument/2006/relationships" xmlns:p="http://schemas.openxmlformats.org/presentationml/2006/main">
   <p:cSld>
     <p:spTree>
@@ -15518,7 +17372,7 @@
           <a:p>
             <a:fld id="{109C872D-39A9-4065-8BF3-6A613116E2A1}" type="slidenum">
               <a:rPr lang="ko-KR" altLang="en-US" smtClean="0"/>
-              <a:t>25</a:t>
+              <a:t>27</a:t>
             </a:fld>
             <a:endParaRPr lang="ko-KR" altLang="en-US"/>
           </a:p>
